--- a/docs/pptx/auc3/ritu-auc3-linsubhr-dosedisc-anemia3.pptx
+++ b/docs/pptx/auc3/ritu-auc3-linsubhr-dosedisc-anemia3.pptx
@@ -2443,7 +2443,7 @@
           </p:nvSpPr>
           <p:spPr>
             <a:xfrm>
-              <a:off x="980186" y="1896563"/>
+              <a:off x="980739" y="1896563"/>
               <a:ext cx="0" cy="3826579"/>
             </a:xfrm>
             <a:custGeom>
@@ -2486,7 +2486,7 @@
           </p:nvSpPr>
           <p:spPr>
             <a:xfrm>
-              <a:off x="3262630" y="1896563"/>
+              <a:off x="3260798" y="1896563"/>
               <a:ext cx="0" cy="3826579"/>
             </a:xfrm>
             <a:custGeom>
@@ -2529,7 +2529,7 @@
           </p:nvSpPr>
           <p:spPr>
             <a:xfrm>
-              <a:off x="5545073" y="1896563"/>
+              <a:off x="5540858" y="1896563"/>
               <a:ext cx="0" cy="3826579"/>
             </a:xfrm>
             <a:custGeom>
@@ -2572,7 +2572,7 @@
           </p:nvSpPr>
           <p:spPr>
             <a:xfrm>
-              <a:off x="7827517" y="1896563"/>
+              <a:off x="7820918" y="1896563"/>
               <a:ext cx="0" cy="3826579"/>
             </a:xfrm>
             <a:custGeom>
@@ -2830,7 +2830,7 @@
           </p:nvSpPr>
           <p:spPr>
             <a:xfrm>
-              <a:off x="2121408" y="1896563"/>
+              <a:off x="2120768" y="1896563"/>
               <a:ext cx="0" cy="3826579"/>
             </a:xfrm>
             <a:custGeom>
@@ -2873,7 +2873,7 @@
           </p:nvSpPr>
           <p:spPr>
             <a:xfrm>
-              <a:off x="4403852" y="1896563"/>
+              <a:off x="4400828" y="1896563"/>
               <a:ext cx="0" cy="3826579"/>
             </a:xfrm>
             <a:custGeom>
@@ -2916,7 +2916,7 @@
           </p:nvSpPr>
           <p:spPr>
             <a:xfrm>
-              <a:off x="6686295" y="1896563"/>
+              <a:off x="6680888" y="1896563"/>
               <a:ext cx="0" cy="3826579"/>
             </a:xfrm>
             <a:custGeom>
@@ -2960,524 +2960,521 @@
           <p:spPr>
             <a:xfrm>
               <a:off x="1172049" y="1896563"/>
-              <a:ext cx="7090630" cy="3593291"/>
+              <a:ext cx="7090630" cy="3592010"/>
             </a:xfrm>
             <a:custGeom>
               <a:avLst/>
               <a:pathLst>
-                <a:path w="7090630" h="3593291">
+                <a:path w="7090630" h="3592010">
                   <a:moveTo>
-                    <a:pt x="0" y="2535309"/>
+                    <a:pt x="0" y="2489658"/>
                   </a:moveTo>
                   <a:lnTo>
-                    <a:pt x="71622" y="2541554"/>
-                  </a:lnTo>
-                  <a:lnTo>
-                    <a:pt x="143245" y="2547763"/>
-                  </a:lnTo>
-                  <a:lnTo>
-                    <a:pt x="214867" y="2553937"/>
-                  </a:lnTo>
-                  <a:lnTo>
-                    <a:pt x="286490" y="2560077"/>
-                  </a:lnTo>
-                  <a:lnTo>
-                    <a:pt x="358112" y="2566183"/>
-                  </a:lnTo>
-                  <a:lnTo>
-                    <a:pt x="429735" y="2572255"/>
-                  </a:lnTo>
-                  <a:lnTo>
-                    <a:pt x="501357" y="2578292"/>
-                  </a:lnTo>
-                  <a:lnTo>
-                    <a:pt x="572980" y="2584296"/>
-                  </a:lnTo>
-                  <a:lnTo>
-                    <a:pt x="644602" y="2590267"/>
-                  </a:lnTo>
-                  <a:lnTo>
-                    <a:pt x="716225" y="2596204"/>
-                  </a:lnTo>
-                  <a:lnTo>
-                    <a:pt x="787847" y="2602108"/>
-                  </a:lnTo>
-                  <a:lnTo>
-                    <a:pt x="859470" y="2607978"/>
-                  </a:lnTo>
-                  <a:lnTo>
-                    <a:pt x="931092" y="2613816"/>
-                  </a:lnTo>
-                  <a:lnTo>
-                    <a:pt x="1002715" y="2619622"/>
-                  </a:lnTo>
-                  <a:lnTo>
-                    <a:pt x="1074337" y="2625395"/>
-                  </a:lnTo>
-                  <a:lnTo>
-                    <a:pt x="1145960" y="2631136"/>
-                  </a:lnTo>
-                  <a:lnTo>
-                    <a:pt x="1217582" y="2636844"/>
-                  </a:lnTo>
-                  <a:lnTo>
-                    <a:pt x="1289205" y="2642521"/>
-                  </a:lnTo>
-                  <a:lnTo>
-                    <a:pt x="1360827" y="2648166"/>
-                  </a:lnTo>
-                  <a:lnTo>
-                    <a:pt x="1432450" y="2653779"/>
-                  </a:lnTo>
-                  <a:lnTo>
-                    <a:pt x="1504073" y="2659361"/>
-                  </a:lnTo>
-                  <a:lnTo>
-                    <a:pt x="1575695" y="2664912"/>
-                  </a:lnTo>
-                  <a:lnTo>
-                    <a:pt x="1647318" y="2670432"/>
-                  </a:lnTo>
-                  <a:lnTo>
-                    <a:pt x="1718940" y="2675921"/>
-                  </a:lnTo>
-                  <a:lnTo>
-                    <a:pt x="1790563" y="2681380"/>
-                  </a:lnTo>
-                  <a:lnTo>
-                    <a:pt x="1862185" y="2686807"/>
-                  </a:lnTo>
-                  <a:lnTo>
-                    <a:pt x="1933808" y="2692205"/>
-                  </a:lnTo>
-                  <a:lnTo>
-                    <a:pt x="2005430" y="2697572"/>
-                  </a:lnTo>
-                  <a:lnTo>
-                    <a:pt x="2077053" y="2702910"/>
-                  </a:lnTo>
-                  <a:lnTo>
-                    <a:pt x="2148675" y="2708217"/>
-                  </a:lnTo>
-                  <a:lnTo>
-                    <a:pt x="2220298" y="2713495"/>
-                  </a:lnTo>
-                  <a:lnTo>
-                    <a:pt x="2291920" y="2718743"/>
-                  </a:lnTo>
-                  <a:lnTo>
-                    <a:pt x="2363543" y="2723962"/>
-                  </a:lnTo>
-                  <a:lnTo>
-                    <a:pt x="2435165" y="2729152"/>
-                  </a:lnTo>
-                  <a:lnTo>
-                    <a:pt x="2506788" y="2734313"/>
-                  </a:lnTo>
-                  <a:lnTo>
-                    <a:pt x="2578410" y="2739445"/>
-                  </a:lnTo>
-                  <a:lnTo>
-                    <a:pt x="2650033" y="2744549"/>
-                  </a:lnTo>
-                  <a:lnTo>
-                    <a:pt x="2721655" y="2749623"/>
-                  </a:lnTo>
-                  <a:lnTo>
-                    <a:pt x="2793278" y="2754670"/>
-                  </a:lnTo>
-                  <a:lnTo>
-                    <a:pt x="2864901" y="2759688"/>
-                  </a:lnTo>
-                  <a:lnTo>
-                    <a:pt x="2936523" y="2764678"/>
-                  </a:lnTo>
-                  <a:lnTo>
-                    <a:pt x="3008146" y="2769641"/>
-                  </a:lnTo>
-                  <a:lnTo>
-                    <a:pt x="3079768" y="2774575"/>
-                  </a:lnTo>
-                  <a:lnTo>
-                    <a:pt x="3151391" y="2779482"/>
-                  </a:lnTo>
-                  <a:lnTo>
-                    <a:pt x="3223013" y="2767872"/>
-                  </a:lnTo>
-                  <a:lnTo>
-                    <a:pt x="3294636" y="2713122"/>
-                  </a:lnTo>
-                  <a:lnTo>
-                    <a:pt x="3366258" y="2654985"/>
-                  </a:lnTo>
-                  <a:lnTo>
-                    <a:pt x="3437881" y="2593250"/>
-                  </a:lnTo>
-                  <a:lnTo>
-                    <a:pt x="3509503" y="2527695"/>
-                  </a:lnTo>
-                  <a:lnTo>
-                    <a:pt x="3581126" y="2458084"/>
-                  </a:lnTo>
-                  <a:lnTo>
-                    <a:pt x="3652748" y="2384165"/>
-                  </a:lnTo>
-                  <a:lnTo>
-                    <a:pt x="3724371" y="2305671"/>
-                  </a:lnTo>
-                  <a:lnTo>
-                    <a:pt x="3795993" y="2222321"/>
-                  </a:lnTo>
-                  <a:lnTo>
-                    <a:pt x="3867616" y="2133813"/>
-                  </a:lnTo>
-                  <a:lnTo>
-                    <a:pt x="3939238" y="2039828"/>
-                  </a:lnTo>
-                  <a:lnTo>
-                    <a:pt x="4010861" y="1940027"/>
-                  </a:lnTo>
-                  <a:lnTo>
-                    <a:pt x="4082483" y="1834051"/>
-                  </a:lnTo>
-                  <a:lnTo>
-                    <a:pt x="4154106" y="1721517"/>
-                  </a:lnTo>
-                  <a:lnTo>
-                    <a:pt x="4225729" y="1602019"/>
-                  </a:lnTo>
-                  <a:lnTo>
-                    <a:pt x="4297351" y="1475127"/>
-                  </a:lnTo>
-                  <a:lnTo>
-                    <a:pt x="4368974" y="1340383"/>
-                  </a:lnTo>
-                  <a:lnTo>
-                    <a:pt x="4440596" y="1197300"/>
-                  </a:lnTo>
-                  <a:lnTo>
-                    <a:pt x="4512219" y="1045364"/>
-                  </a:lnTo>
-                  <a:lnTo>
-                    <a:pt x="4583841" y="884026"/>
-                  </a:lnTo>
-                  <a:lnTo>
-                    <a:pt x="4655464" y="712705"/>
-                  </a:lnTo>
-                  <a:lnTo>
-                    <a:pt x="4727086" y="530782"/>
-                  </a:lnTo>
-                  <a:lnTo>
-                    <a:pt x="4798709" y="337602"/>
-                  </a:lnTo>
-                  <a:lnTo>
-                    <a:pt x="4870331" y="132468"/>
-                  </a:lnTo>
-                  <a:lnTo>
-                    <a:pt x="4913887" y="0"/>
+                    <a:pt x="71622" y="2497289"/>
+                  </a:lnTo>
+                  <a:lnTo>
+                    <a:pt x="143245" y="2504869"/>
+                  </a:lnTo>
+                  <a:lnTo>
+                    <a:pt x="214867" y="2512400"/>
+                  </a:lnTo>
+                  <a:lnTo>
+                    <a:pt x="286490" y="2519882"/>
+                  </a:lnTo>
+                  <a:lnTo>
+                    <a:pt x="358112" y="2527314"/>
+                  </a:lnTo>
+                  <a:lnTo>
+                    <a:pt x="429735" y="2534698"/>
+                  </a:lnTo>
+                  <a:lnTo>
+                    <a:pt x="501357" y="2542033"/>
+                  </a:lnTo>
+                  <a:lnTo>
+                    <a:pt x="572980" y="2549320"/>
+                  </a:lnTo>
+                  <a:lnTo>
+                    <a:pt x="644602" y="2556559"/>
+                  </a:lnTo>
+                  <a:lnTo>
+                    <a:pt x="716225" y="2563751"/>
+                  </a:lnTo>
+                  <a:lnTo>
+                    <a:pt x="787847" y="2570895"/>
+                  </a:lnTo>
+                  <a:lnTo>
+                    <a:pt x="859470" y="2577993"/>
+                  </a:lnTo>
+                  <a:lnTo>
+                    <a:pt x="931092" y="2585044"/>
+                  </a:lnTo>
+                  <a:lnTo>
+                    <a:pt x="1002715" y="2592049"/>
+                  </a:lnTo>
+                  <a:lnTo>
+                    <a:pt x="1074337" y="2599008"/>
+                  </a:lnTo>
+                  <a:lnTo>
+                    <a:pt x="1145960" y="2605921"/>
+                  </a:lnTo>
+                  <a:lnTo>
+                    <a:pt x="1217582" y="2612789"/>
+                  </a:lnTo>
+                  <a:lnTo>
+                    <a:pt x="1289205" y="2619611"/>
+                  </a:lnTo>
+                  <a:lnTo>
+                    <a:pt x="1360827" y="2626390"/>
+                  </a:lnTo>
+                  <a:lnTo>
+                    <a:pt x="1432450" y="2633123"/>
+                  </a:lnTo>
+                  <a:lnTo>
+                    <a:pt x="1504073" y="2639812"/>
+                  </a:lnTo>
+                  <a:lnTo>
+                    <a:pt x="1575695" y="2646458"/>
+                  </a:lnTo>
+                  <a:lnTo>
+                    <a:pt x="1647318" y="2653060"/>
+                  </a:lnTo>
+                  <a:lnTo>
+                    <a:pt x="1718940" y="2659618"/>
+                  </a:lnTo>
+                  <a:lnTo>
+                    <a:pt x="1790563" y="2666134"/>
+                  </a:lnTo>
+                  <a:lnTo>
+                    <a:pt x="1862185" y="2672607"/>
+                  </a:lnTo>
+                  <a:lnTo>
+                    <a:pt x="1933808" y="2679037"/>
+                  </a:lnTo>
+                  <a:lnTo>
+                    <a:pt x="2005430" y="2685425"/>
+                  </a:lnTo>
+                  <a:lnTo>
+                    <a:pt x="2077053" y="2691771"/>
+                  </a:lnTo>
+                  <a:lnTo>
+                    <a:pt x="2148675" y="2698076"/>
+                  </a:lnTo>
+                  <a:lnTo>
+                    <a:pt x="2220298" y="2704339"/>
+                  </a:lnTo>
+                  <a:lnTo>
+                    <a:pt x="2291920" y="2710561"/>
+                  </a:lnTo>
+                  <a:lnTo>
+                    <a:pt x="2363543" y="2716742"/>
+                  </a:lnTo>
+                  <a:lnTo>
+                    <a:pt x="2435165" y="2722883"/>
+                  </a:lnTo>
+                  <a:lnTo>
+                    <a:pt x="2506788" y="2728983"/>
+                  </a:lnTo>
+                  <a:lnTo>
+                    <a:pt x="2578410" y="2735044"/>
+                  </a:lnTo>
+                  <a:lnTo>
+                    <a:pt x="2650033" y="2741064"/>
+                  </a:lnTo>
+                  <a:lnTo>
+                    <a:pt x="2721655" y="2747046"/>
+                  </a:lnTo>
+                  <a:lnTo>
+                    <a:pt x="2793278" y="2752987"/>
+                  </a:lnTo>
+                  <a:lnTo>
+                    <a:pt x="2864901" y="2758890"/>
+                  </a:lnTo>
+                  <a:lnTo>
+                    <a:pt x="2936523" y="2764755"/>
+                  </a:lnTo>
+                  <a:lnTo>
+                    <a:pt x="3008146" y="2770580"/>
+                  </a:lnTo>
+                  <a:lnTo>
+                    <a:pt x="3079768" y="2776368"/>
+                  </a:lnTo>
+                  <a:lnTo>
+                    <a:pt x="3151391" y="2782117"/>
+                  </a:lnTo>
+                  <a:lnTo>
+                    <a:pt x="3223013" y="2737111"/>
+                  </a:lnTo>
+                  <a:lnTo>
+                    <a:pt x="3294636" y="2680181"/>
+                  </a:lnTo>
+                  <a:lnTo>
+                    <a:pt x="3366258" y="2619711"/>
+                  </a:lnTo>
+                  <a:lnTo>
+                    <a:pt x="3437881" y="2555481"/>
+                  </a:lnTo>
+                  <a:lnTo>
+                    <a:pt x="3509503" y="2487257"/>
+                  </a:lnTo>
+                  <a:lnTo>
+                    <a:pt x="3581126" y="2414790"/>
+                  </a:lnTo>
+                  <a:lnTo>
+                    <a:pt x="3652748" y="2337817"/>
+                  </a:lnTo>
+                  <a:lnTo>
+                    <a:pt x="3724371" y="2256058"/>
+                  </a:lnTo>
+                  <a:lnTo>
+                    <a:pt x="3795993" y="2169215"/>
+                  </a:lnTo>
+                  <a:lnTo>
+                    <a:pt x="3867616" y="2076972"/>
+                  </a:lnTo>
+                  <a:lnTo>
+                    <a:pt x="3939238" y="1978993"/>
+                  </a:lnTo>
+                  <a:lnTo>
+                    <a:pt x="4010861" y="1874922"/>
+                  </a:lnTo>
+                  <a:lnTo>
+                    <a:pt x="4082483" y="1764379"/>
+                  </a:lnTo>
+                  <a:lnTo>
+                    <a:pt x="4154106" y="1646962"/>
+                  </a:lnTo>
+                  <a:lnTo>
+                    <a:pt x="4225729" y="1522244"/>
+                  </a:lnTo>
+                  <a:lnTo>
+                    <a:pt x="4297351" y="1389771"/>
+                  </a:lnTo>
+                  <a:lnTo>
+                    <a:pt x="4368974" y="1249060"/>
+                  </a:lnTo>
+                  <a:lnTo>
+                    <a:pt x="4440596" y="1099599"/>
+                  </a:lnTo>
+                  <a:lnTo>
+                    <a:pt x="4512219" y="940845"/>
+                  </a:lnTo>
+                  <a:lnTo>
+                    <a:pt x="4583841" y="772219"/>
+                  </a:lnTo>
+                  <a:lnTo>
+                    <a:pt x="4655464" y="593107"/>
+                  </a:lnTo>
+                  <a:lnTo>
+                    <a:pt x="4727086" y="402858"/>
+                  </a:lnTo>
+                  <a:lnTo>
+                    <a:pt x="4798709" y="200778"/>
+                  </a:lnTo>
+                  <a:lnTo>
+                    <a:pt x="4865704" y="0"/>
                   </a:lnTo>
                   <a:lnTo>
                     <a:pt x="7090630" y="0"/>
                   </a:lnTo>
                   <a:lnTo>
-                    <a:pt x="7090630" y="3011089"/>
-                  </a:lnTo>
-                  <a:lnTo>
-                    <a:pt x="7019007" y="3007483"/>
-                  </a:lnTo>
-                  <a:lnTo>
-                    <a:pt x="6947385" y="3003858"/>
-                  </a:lnTo>
-                  <a:lnTo>
-                    <a:pt x="6875762" y="3000212"/>
-                  </a:lnTo>
-                  <a:lnTo>
-                    <a:pt x="6804139" y="2996545"/>
-                  </a:lnTo>
-                  <a:lnTo>
-                    <a:pt x="6732517" y="2992858"/>
-                  </a:lnTo>
-                  <a:lnTo>
-                    <a:pt x="6660894" y="2989150"/>
-                  </a:lnTo>
-                  <a:lnTo>
-                    <a:pt x="6589272" y="2985421"/>
-                  </a:lnTo>
-                  <a:lnTo>
-                    <a:pt x="6517649" y="2981672"/>
-                  </a:lnTo>
-                  <a:lnTo>
-                    <a:pt x="6446027" y="2977901"/>
-                  </a:lnTo>
-                  <a:lnTo>
-                    <a:pt x="6374404" y="2974109"/>
-                  </a:lnTo>
-                  <a:lnTo>
-                    <a:pt x="6302782" y="2970296"/>
-                  </a:lnTo>
-                  <a:lnTo>
-                    <a:pt x="6231159" y="2966461"/>
-                  </a:lnTo>
-                  <a:lnTo>
-                    <a:pt x="6159537" y="2962605"/>
-                  </a:lnTo>
-                  <a:lnTo>
-                    <a:pt x="6087914" y="2958727"/>
-                  </a:lnTo>
-                  <a:lnTo>
-                    <a:pt x="6016292" y="2954827"/>
-                  </a:lnTo>
-                  <a:lnTo>
-                    <a:pt x="5944669" y="2950905"/>
-                  </a:lnTo>
-                  <a:lnTo>
-                    <a:pt x="5873047" y="2946962"/>
-                  </a:lnTo>
-                  <a:lnTo>
-                    <a:pt x="5801424" y="2942996"/>
-                  </a:lnTo>
-                  <a:lnTo>
-                    <a:pt x="5729802" y="2939008"/>
-                  </a:lnTo>
-                  <a:lnTo>
-                    <a:pt x="5658179" y="2934997"/>
-                  </a:lnTo>
-                  <a:lnTo>
-                    <a:pt x="5586557" y="2930964"/>
-                  </a:lnTo>
-                  <a:lnTo>
-                    <a:pt x="5514934" y="2926909"/>
-                  </a:lnTo>
-                  <a:lnTo>
-                    <a:pt x="5443311" y="2922830"/>
-                  </a:lnTo>
-                  <a:lnTo>
-                    <a:pt x="5371689" y="2918729"/>
-                  </a:lnTo>
-                  <a:lnTo>
-                    <a:pt x="5300066" y="2914604"/>
-                  </a:lnTo>
-                  <a:lnTo>
-                    <a:pt x="5228444" y="2910457"/>
-                  </a:lnTo>
-                  <a:lnTo>
-                    <a:pt x="5156821" y="2906286"/>
-                  </a:lnTo>
-                  <a:lnTo>
-                    <a:pt x="5085199" y="2902091"/>
-                  </a:lnTo>
-                  <a:lnTo>
-                    <a:pt x="5013576" y="2897873"/>
-                  </a:lnTo>
-                  <a:lnTo>
-                    <a:pt x="4941954" y="2893631"/>
-                  </a:lnTo>
-                  <a:lnTo>
-                    <a:pt x="4870331" y="2889366"/>
-                  </a:lnTo>
-                  <a:lnTo>
-                    <a:pt x="4798709" y="2885076"/>
-                  </a:lnTo>
-                  <a:lnTo>
-                    <a:pt x="4727086" y="2880763"/>
-                  </a:lnTo>
-                  <a:lnTo>
-                    <a:pt x="4655464" y="2876425"/>
-                  </a:lnTo>
-                  <a:lnTo>
-                    <a:pt x="4583841" y="2872063"/>
-                  </a:lnTo>
-                  <a:lnTo>
-                    <a:pt x="4512219" y="2867676"/>
-                  </a:lnTo>
-                  <a:lnTo>
-                    <a:pt x="4440596" y="2863265"/>
-                  </a:lnTo>
-                  <a:lnTo>
-                    <a:pt x="4368974" y="2858829"/>
-                  </a:lnTo>
-                  <a:lnTo>
-                    <a:pt x="4297351" y="2854367"/>
-                  </a:lnTo>
-                  <a:lnTo>
-                    <a:pt x="4225729" y="2849881"/>
-                  </a:lnTo>
-                  <a:lnTo>
-                    <a:pt x="4154106" y="2845370"/>
-                  </a:lnTo>
-                  <a:lnTo>
-                    <a:pt x="4082483" y="2840833"/>
-                  </a:lnTo>
-                  <a:lnTo>
-                    <a:pt x="4010861" y="2836271"/>
-                  </a:lnTo>
-                  <a:lnTo>
-                    <a:pt x="3939238" y="2831683"/>
-                  </a:lnTo>
-                  <a:lnTo>
-                    <a:pt x="3867616" y="2827069"/>
-                  </a:lnTo>
-                  <a:lnTo>
-                    <a:pt x="3795993" y="2822430"/>
-                  </a:lnTo>
-                  <a:lnTo>
-                    <a:pt x="3724371" y="2817764"/>
-                  </a:lnTo>
-                  <a:lnTo>
-                    <a:pt x="3652748" y="2813072"/>
-                  </a:lnTo>
-                  <a:lnTo>
-                    <a:pt x="3581126" y="2808354"/>
-                  </a:lnTo>
-                  <a:lnTo>
-                    <a:pt x="3509503" y="2803609"/>
-                  </a:lnTo>
-                  <a:lnTo>
-                    <a:pt x="3437881" y="2798838"/>
-                  </a:lnTo>
-                  <a:lnTo>
-                    <a:pt x="3366258" y="2794039"/>
-                  </a:lnTo>
-                  <a:lnTo>
-                    <a:pt x="3294636" y="2789214"/>
-                  </a:lnTo>
-                  <a:lnTo>
-                    <a:pt x="3223013" y="2784362"/>
-                  </a:lnTo>
-                  <a:lnTo>
-                    <a:pt x="3151391" y="2819431"/>
-                  </a:lnTo>
-                  <a:lnTo>
-                    <a:pt x="3079768" y="2867985"/>
-                  </a:lnTo>
-                  <a:lnTo>
-                    <a:pt x="3008146" y="2913710"/>
-                  </a:lnTo>
-                  <a:lnTo>
-                    <a:pt x="2936523" y="2956771"/>
-                  </a:lnTo>
-                  <a:lnTo>
-                    <a:pt x="2864901" y="2997322"/>
-                  </a:lnTo>
-                  <a:lnTo>
-                    <a:pt x="2793278" y="3035510"/>
-                  </a:lnTo>
-                  <a:lnTo>
-                    <a:pt x="2721655" y="3071473"/>
-                  </a:lnTo>
-                  <a:lnTo>
-                    <a:pt x="2650033" y="3105340"/>
-                  </a:lnTo>
-                  <a:lnTo>
-                    <a:pt x="2578410" y="3137233"/>
-                  </a:lnTo>
-                  <a:lnTo>
-                    <a:pt x="2506788" y="3167268"/>
-                  </a:lnTo>
-                  <a:lnTo>
-                    <a:pt x="2435165" y="3195553"/>
-                  </a:lnTo>
-                  <a:lnTo>
-                    <a:pt x="2363543" y="3222189"/>
-                  </a:lnTo>
-                  <a:lnTo>
-                    <a:pt x="2291920" y="3247274"/>
-                  </a:lnTo>
-                  <a:lnTo>
-                    <a:pt x="2220298" y="3270896"/>
-                  </a:lnTo>
-                  <a:lnTo>
-                    <a:pt x="2148675" y="3293142"/>
-                  </a:lnTo>
-                  <a:lnTo>
-                    <a:pt x="2077053" y="3314091"/>
-                  </a:lnTo>
-                  <a:lnTo>
-                    <a:pt x="2005430" y="3333820"/>
-                  </a:lnTo>
-                  <a:lnTo>
-                    <a:pt x="1933808" y="3352399"/>
-                  </a:lnTo>
-                  <a:lnTo>
-                    <a:pt x="1862185" y="3369896"/>
-                  </a:lnTo>
-                  <a:lnTo>
-                    <a:pt x="1790563" y="3386372"/>
-                  </a:lnTo>
-                  <a:lnTo>
-                    <a:pt x="1718940" y="3401889"/>
-                  </a:lnTo>
-                  <a:lnTo>
-                    <a:pt x="1647318" y="3416501"/>
-                  </a:lnTo>
-                  <a:lnTo>
-                    <a:pt x="1575695" y="3430262"/>
-                  </a:lnTo>
-                  <a:lnTo>
-                    <a:pt x="1504073" y="3443221"/>
-                  </a:lnTo>
-                  <a:lnTo>
-                    <a:pt x="1432450" y="3455425"/>
-                  </a:lnTo>
-                  <a:lnTo>
-                    <a:pt x="1360827" y="3466918"/>
-                  </a:lnTo>
-                  <a:lnTo>
-                    <a:pt x="1289205" y="3477741"/>
-                  </a:lnTo>
-                  <a:lnTo>
-                    <a:pt x="1217582" y="3487933"/>
-                  </a:lnTo>
-                  <a:lnTo>
-                    <a:pt x="1145960" y="3497531"/>
-                  </a:lnTo>
-                  <a:lnTo>
-                    <a:pt x="1074337" y="3506570"/>
-                  </a:lnTo>
-                  <a:lnTo>
-                    <a:pt x="1002715" y="3515082"/>
-                  </a:lnTo>
-                  <a:lnTo>
-                    <a:pt x="931092" y="3523099"/>
-                  </a:lnTo>
-                  <a:lnTo>
-                    <a:pt x="859470" y="3530648"/>
-                  </a:lnTo>
-                  <a:lnTo>
-                    <a:pt x="787847" y="3537757"/>
-                  </a:lnTo>
-                  <a:lnTo>
-                    <a:pt x="716225" y="3544452"/>
-                  </a:lnTo>
-                  <a:lnTo>
-                    <a:pt x="644602" y="3550756"/>
-                  </a:lnTo>
-                  <a:lnTo>
-                    <a:pt x="572980" y="3556694"/>
-                  </a:lnTo>
-                  <a:lnTo>
-                    <a:pt x="501357" y="3562285"/>
-                  </a:lnTo>
-                  <a:lnTo>
-                    <a:pt x="429735" y="3567551"/>
-                  </a:lnTo>
-                  <a:lnTo>
-                    <a:pt x="358112" y="3572509"/>
-                  </a:lnTo>
-                  <a:lnTo>
-                    <a:pt x="286490" y="3577179"/>
-                  </a:lnTo>
-                  <a:lnTo>
-                    <a:pt x="214867" y="3581577"/>
-                  </a:lnTo>
-                  <a:lnTo>
-                    <a:pt x="143245" y="3585718"/>
-                  </a:lnTo>
-                  <a:lnTo>
-                    <a:pt x="71622" y="3589618"/>
-                  </a:lnTo>
-                  <a:lnTo>
-                    <a:pt x="0" y="3593291"/>
+                    <a:pt x="7090630" y="3046548"/>
+                  </a:lnTo>
+                  <a:lnTo>
+                    <a:pt x="7019007" y="3042544"/>
+                  </a:lnTo>
+                  <a:lnTo>
+                    <a:pt x="6947385" y="3038515"/>
+                  </a:lnTo>
+                  <a:lnTo>
+                    <a:pt x="6875762" y="3034459"/>
+                  </a:lnTo>
+                  <a:lnTo>
+                    <a:pt x="6804139" y="3030376"/>
+                  </a:lnTo>
+                  <a:lnTo>
+                    <a:pt x="6732517" y="3026266"/>
+                  </a:lnTo>
+                  <a:lnTo>
+                    <a:pt x="6660894" y="3022129"/>
+                  </a:lnTo>
+                  <a:lnTo>
+                    <a:pt x="6589272" y="3017965"/>
+                  </a:lnTo>
+                  <a:lnTo>
+                    <a:pt x="6517649" y="3013773"/>
+                  </a:lnTo>
+                  <a:lnTo>
+                    <a:pt x="6446027" y="3009554"/>
+                  </a:lnTo>
+                  <a:lnTo>
+                    <a:pt x="6374404" y="3005306"/>
+                  </a:lnTo>
+                  <a:lnTo>
+                    <a:pt x="6302782" y="3001031"/>
+                  </a:lnTo>
+                  <a:lnTo>
+                    <a:pt x="6231159" y="2996727"/>
+                  </a:lnTo>
+                  <a:lnTo>
+                    <a:pt x="6159537" y="2992395"/>
+                  </a:lnTo>
+                  <a:lnTo>
+                    <a:pt x="6087914" y="2988034"/>
+                  </a:lnTo>
+                  <a:lnTo>
+                    <a:pt x="6016292" y="2983645"/>
+                  </a:lnTo>
+                  <a:lnTo>
+                    <a:pt x="5944669" y="2979226"/>
+                  </a:lnTo>
+                  <a:lnTo>
+                    <a:pt x="5873047" y="2974779"/>
+                  </a:lnTo>
+                  <a:lnTo>
+                    <a:pt x="5801424" y="2970302"/>
+                  </a:lnTo>
+                  <a:lnTo>
+                    <a:pt x="5729802" y="2965795"/>
+                  </a:lnTo>
+                  <a:lnTo>
+                    <a:pt x="5658179" y="2961259"/>
+                  </a:lnTo>
+                  <a:lnTo>
+                    <a:pt x="5586557" y="2956692"/>
+                  </a:lnTo>
+                  <a:lnTo>
+                    <a:pt x="5514934" y="2952096"/>
+                  </a:lnTo>
+                  <a:lnTo>
+                    <a:pt x="5443311" y="2947469"/>
+                  </a:lnTo>
+                  <a:lnTo>
+                    <a:pt x="5371689" y="2942812"/>
+                  </a:lnTo>
+                  <a:lnTo>
+                    <a:pt x="5300066" y="2938124"/>
+                  </a:lnTo>
+                  <a:lnTo>
+                    <a:pt x="5228444" y="2933404"/>
+                  </a:lnTo>
+                  <a:lnTo>
+                    <a:pt x="5156821" y="2928654"/>
+                  </a:lnTo>
+                  <a:lnTo>
+                    <a:pt x="5085199" y="2923872"/>
+                  </a:lnTo>
+                  <a:lnTo>
+                    <a:pt x="5013576" y="2919059"/>
+                  </a:lnTo>
+                  <a:lnTo>
+                    <a:pt x="4941954" y="2914214"/>
+                  </a:lnTo>
+                  <a:lnTo>
+                    <a:pt x="4870331" y="2909337"/>
+                  </a:lnTo>
+                  <a:lnTo>
+                    <a:pt x="4798709" y="2904428"/>
+                  </a:lnTo>
+                  <a:lnTo>
+                    <a:pt x="4727086" y="2899486"/>
+                  </a:lnTo>
+                  <a:lnTo>
+                    <a:pt x="4655464" y="2894512"/>
+                  </a:lnTo>
+                  <a:lnTo>
+                    <a:pt x="4583841" y="2889505"/>
+                  </a:lnTo>
+                  <a:lnTo>
+                    <a:pt x="4512219" y="2884464"/>
+                  </a:lnTo>
+                  <a:lnTo>
+                    <a:pt x="4440596" y="2879391"/>
+                  </a:lnTo>
+                  <a:lnTo>
+                    <a:pt x="4368974" y="2874284"/>
+                  </a:lnTo>
+                  <a:lnTo>
+                    <a:pt x="4297351" y="2869143"/>
+                  </a:lnTo>
+                  <a:lnTo>
+                    <a:pt x="4225729" y="2863968"/>
+                  </a:lnTo>
+                  <a:lnTo>
+                    <a:pt x="4154106" y="2858759"/>
+                  </a:lnTo>
+                  <a:lnTo>
+                    <a:pt x="4082483" y="2853516"/>
+                  </a:lnTo>
+                  <a:lnTo>
+                    <a:pt x="4010861" y="2848238"/>
+                  </a:lnTo>
+                  <a:lnTo>
+                    <a:pt x="3939238" y="2842925"/>
+                  </a:lnTo>
+                  <a:lnTo>
+                    <a:pt x="3867616" y="2837578"/>
+                  </a:lnTo>
+                  <a:lnTo>
+                    <a:pt x="3795993" y="2832194"/>
+                  </a:lnTo>
+                  <a:lnTo>
+                    <a:pt x="3724371" y="2826776"/>
+                  </a:lnTo>
+                  <a:lnTo>
+                    <a:pt x="3652748" y="2821321"/>
+                  </a:lnTo>
+                  <a:lnTo>
+                    <a:pt x="3581126" y="2815831"/>
+                  </a:lnTo>
+                  <a:lnTo>
+                    <a:pt x="3509503" y="2810304"/>
+                  </a:lnTo>
+                  <a:lnTo>
+                    <a:pt x="3437881" y="2804740"/>
+                  </a:lnTo>
+                  <a:lnTo>
+                    <a:pt x="3366258" y="2799140"/>
+                  </a:lnTo>
+                  <a:lnTo>
+                    <a:pt x="3294636" y="2793503"/>
+                  </a:lnTo>
+                  <a:lnTo>
+                    <a:pt x="3223013" y="2787829"/>
+                  </a:lnTo>
+                  <a:lnTo>
+                    <a:pt x="3151391" y="2790708"/>
+                  </a:lnTo>
+                  <a:lnTo>
+                    <a:pt x="3079768" y="2841168"/>
+                  </a:lnTo>
+                  <a:lnTo>
+                    <a:pt x="3008146" y="2888673"/>
+                  </a:lnTo>
+                  <a:lnTo>
+                    <a:pt x="2936523" y="2933398"/>
+                  </a:lnTo>
+                  <a:lnTo>
+                    <a:pt x="2864901" y="2975504"/>
+                  </a:lnTo>
+                  <a:lnTo>
+                    <a:pt x="2793278" y="3015145"/>
+                  </a:lnTo>
+                  <a:lnTo>
+                    <a:pt x="2721655" y="3052465"/>
+                  </a:lnTo>
+                  <a:lnTo>
+                    <a:pt x="2650033" y="3087601"/>
+                  </a:lnTo>
+                  <a:lnTo>
+                    <a:pt x="2578410" y="3120680"/>
+                  </a:lnTo>
+                  <a:lnTo>
+                    <a:pt x="2506788" y="3151822"/>
+                  </a:lnTo>
+                  <a:lnTo>
+                    <a:pt x="2435165" y="3181141"/>
+                  </a:lnTo>
+                  <a:lnTo>
+                    <a:pt x="2363543" y="3208744"/>
+                  </a:lnTo>
+                  <a:lnTo>
+                    <a:pt x="2291920" y="3234731"/>
+                  </a:lnTo>
+                  <a:lnTo>
+                    <a:pt x="2220298" y="3259196"/>
+                  </a:lnTo>
+                  <a:lnTo>
+                    <a:pt x="2148675" y="3282229"/>
+                  </a:lnTo>
+                  <a:lnTo>
+                    <a:pt x="2077053" y="3303914"/>
+                  </a:lnTo>
+                  <a:lnTo>
+                    <a:pt x="2005430" y="3324330"/>
+                  </a:lnTo>
+                  <a:lnTo>
+                    <a:pt x="1933808" y="3343550"/>
+                  </a:lnTo>
+                  <a:lnTo>
+                    <a:pt x="1862185" y="3361645"/>
+                  </a:lnTo>
+                  <a:lnTo>
+                    <a:pt x="1790563" y="3378680"/>
+                  </a:lnTo>
+                  <a:lnTo>
+                    <a:pt x="1718940" y="3394719"/>
+                  </a:lnTo>
+                  <a:lnTo>
+                    <a:pt x="1647318" y="3409818"/>
+                  </a:lnTo>
+                  <a:lnTo>
+                    <a:pt x="1575695" y="3424034"/>
+                  </a:lnTo>
+                  <a:lnTo>
+                    <a:pt x="1504073" y="3437417"/>
+                  </a:lnTo>
+                  <a:lnTo>
+                    <a:pt x="1432450" y="3450017"/>
+                  </a:lnTo>
+                  <a:lnTo>
+                    <a:pt x="1360827" y="3461879"/>
+                  </a:lnTo>
+                  <a:lnTo>
+                    <a:pt x="1289205" y="3473047"/>
+                  </a:lnTo>
+                  <a:lnTo>
+                    <a:pt x="1217582" y="3483561"/>
+                  </a:lnTo>
+                  <a:lnTo>
+                    <a:pt x="1145960" y="3493459"/>
+                  </a:lnTo>
+                  <a:lnTo>
+                    <a:pt x="1074337" y="3502778"/>
+                  </a:lnTo>
+                  <a:lnTo>
+                    <a:pt x="1002715" y="3511552"/>
+                  </a:lnTo>
+                  <a:lnTo>
+                    <a:pt x="931092" y="3519811"/>
+                  </a:lnTo>
+                  <a:lnTo>
+                    <a:pt x="859470" y="3527588"/>
+                  </a:lnTo>
+                  <a:lnTo>
+                    <a:pt x="787847" y="3534909"/>
+                  </a:lnTo>
+                  <a:lnTo>
+                    <a:pt x="716225" y="3541801"/>
+                  </a:lnTo>
+                  <a:lnTo>
+                    <a:pt x="644602" y="3548290"/>
+                  </a:lnTo>
+                  <a:lnTo>
+                    <a:pt x="572980" y="3554399"/>
+                  </a:lnTo>
+                  <a:lnTo>
+                    <a:pt x="501357" y="3560150"/>
+                  </a:lnTo>
+                  <a:lnTo>
+                    <a:pt x="429735" y="3565565"/>
+                  </a:lnTo>
+                  <a:lnTo>
+                    <a:pt x="358112" y="3570663"/>
+                  </a:lnTo>
+                  <a:lnTo>
+                    <a:pt x="286490" y="3575462"/>
+                  </a:lnTo>
+                  <a:lnTo>
+                    <a:pt x="214867" y="3579981"/>
+                  </a:lnTo>
+                  <a:lnTo>
+                    <a:pt x="143245" y="3584234"/>
+                  </a:lnTo>
+                  <a:lnTo>
+                    <a:pt x="71622" y="3588239"/>
+                  </a:lnTo>
+                  <a:lnTo>
+                    <a:pt x="0" y="3592010"/>
                   </a:lnTo>
                   <a:close/>
                 </a:path>
@@ -3504,221 +3501,218 @@
           <p:spPr>
             <a:xfrm>
               <a:off x="1172049" y="1896563"/>
-              <a:ext cx="4913887" cy="2779482"/>
+              <a:ext cx="4865704" cy="2782117"/>
             </a:xfrm>
             <a:custGeom>
               <a:avLst/>
               <a:pathLst>
-                <a:path w="4913887" h="2779482">
+                <a:path w="4865704" h="2782117">
                   <a:moveTo>
-                    <a:pt x="0" y="2535309"/>
+                    <a:pt x="0" y="2489658"/>
                   </a:moveTo>
                   <a:lnTo>
-                    <a:pt x="71622" y="2541554"/>
-                  </a:lnTo>
-                  <a:lnTo>
-                    <a:pt x="143245" y="2547763"/>
-                  </a:lnTo>
-                  <a:lnTo>
-                    <a:pt x="214867" y="2553937"/>
-                  </a:lnTo>
-                  <a:lnTo>
-                    <a:pt x="286490" y="2560077"/>
-                  </a:lnTo>
-                  <a:lnTo>
-                    <a:pt x="358112" y="2566183"/>
-                  </a:lnTo>
-                  <a:lnTo>
-                    <a:pt x="429735" y="2572255"/>
-                  </a:lnTo>
-                  <a:lnTo>
-                    <a:pt x="501357" y="2578292"/>
-                  </a:lnTo>
-                  <a:lnTo>
-                    <a:pt x="572980" y="2584296"/>
-                  </a:lnTo>
-                  <a:lnTo>
-                    <a:pt x="644602" y="2590267"/>
-                  </a:lnTo>
-                  <a:lnTo>
-                    <a:pt x="716225" y="2596204"/>
-                  </a:lnTo>
-                  <a:lnTo>
-                    <a:pt x="787847" y="2602108"/>
-                  </a:lnTo>
-                  <a:lnTo>
-                    <a:pt x="859470" y="2607978"/>
-                  </a:lnTo>
-                  <a:lnTo>
-                    <a:pt x="931092" y="2613816"/>
-                  </a:lnTo>
-                  <a:lnTo>
-                    <a:pt x="1002715" y="2619622"/>
-                  </a:lnTo>
-                  <a:lnTo>
-                    <a:pt x="1074337" y="2625395"/>
-                  </a:lnTo>
-                  <a:lnTo>
-                    <a:pt x="1145960" y="2631136"/>
-                  </a:lnTo>
-                  <a:lnTo>
-                    <a:pt x="1217582" y="2636844"/>
-                  </a:lnTo>
-                  <a:lnTo>
-                    <a:pt x="1289205" y="2642521"/>
-                  </a:lnTo>
-                  <a:lnTo>
-                    <a:pt x="1360827" y="2648166"/>
-                  </a:lnTo>
-                  <a:lnTo>
-                    <a:pt x="1432450" y="2653779"/>
-                  </a:lnTo>
-                  <a:lnTo>
-                    <a:pt x="1504073" y="2659361"/>
-                  </a:lnTo>
-                  <a:lnTo>
-                    <a:pt x="1575695" y="2664912"/>
-                  </a:lnTo>
-                  <a:lnTo>
-                    <a:pt x="1647318" y="2670432"/>
-                  </a:lnTo>
-                  <a:lnTo>
-                    <a:pt x="1718940" y="2675921"/>
-                  </a:lnTo>
-                  <a:lnTo>
-                    <a:pt x="1790563" y="2681380"/>
-                  </a:lnTo>
-                  <a:lnTo>
-                    <a:pt x="1862185" y="2686807"/>
-                  </a:lnTo>
-                  <a:lnTo>
-                    <a:pt x="1933808" y="2692205"/>
-                  </a:lnTo>
-                  <a:lnTo>
-                    <a:pt x="2005430" y="2697572"/>
-                  </a:lnTo>
-                  <a:lnTo>
-                    <a:pt x="2077053" y="2702910"/>
-                  </a:lnTo>
-                  <a:lnTo>
-                    <a:pt x="2148675" y="2708217"/>
-                  </a:lnTo>
-                  <a:lnTo>
-                    <a:pt x="2220298" y="2713495"/>
-                  </a:lnTo>
-                  <a:lnTo>
-                    <a:pt x="2291920" y="2718743"/>
-                  </a:lnTo>
-                  <a:lnTo>
-                    <a:pt x="2363543" y="2723962"/>
-                  </a:lnTo>
-                  <a:lnTo>
-                    <a:pt x="2435165" y="2729152"/>
-                  </a:lnTo>
-                  <a:lnTo>
-                    <a:pt x="2506788" y="2734313"/>
-                  </a:lnTo>
-                  <a:lnTo>
-                    <a:pt x="2578410" y="2739445"/>
-                  </a:lnTo>
-                  <a:lnTo>
-                    <a:pt x="2650033" y="2744549"/>
-                  </a:lnTo>
-                  <a:lnTo>
-                    <a:pt x="2721655" y="2749623"/>
-                  </a:lnTo>
-                  <a:lnTo>
-                    <a:pt x="2793278" y="2754670"/>
-                  </a:lnTo>
-                  <a:lnTo>
-                    <a:pt x="2864901" y="2759688"/>
-                  </a:lnTo>
-                  <a:lnTo>
-                    <a:pt x="2936523" y="2764678"/>
-                  </a:lnTo>
-                  <a:lnTo>
-                    <a:pt x="3008146" y="2769641"/>
-                  </a:lnTo>
-                  <a:lnTo>
-                    <a:pt x="3079768" y="2774575"/>
-                  </a:lnTo>
-                  <a:lnTo>
-                    <a:pt x="3151391" y="2779482"/>
-                  </a:lnTo>
-                  <a:lnTo>
-                    <a:pt x="3223013" y="2767872"/>
-                  </a:lnTo>
-                  <a:lnTo>
-                    <a:pt x="3294636" y="2713122"/>
-                  </a:lnTo>
-                  <a:lnTo>
-                    <a:pt x="3366258" y="2654985"/>
-                  </a:lnTo>
-                  <a:lnTo>
-                    <a:pt x="3437881" y="2593250"/>
-                  </a:lnTo>
-                  <a:lnTo>
-                    <a:pt x="3509503" y="2527695"/>
-                  </a:lnTo>
-                  <a:lnTo>
-                    <a:pt x="3581126" y="2458084"/>
-                  </a:lnTo>
-                  <a:lnTo>
-                    <a:pt x="3652748" y="2384165"/>
-                  </a:lnTo>
-                  <a:lnTo>
-                    <a:pt x="3724371" y="2305671"/>
-                  </a:lnTo>
-                  <a:lnTo>
-                    <a:pt x="3795993" y="2222321"/>
-                  </a:lnTo>
-                  <a:lnTo>
-                    <a:pt x="3867616" y="2133813"/>
-                  </a:lnTo>
-                  <a:lnTo>
-                    <a:pt x="3939238" y="2039828"/>
-                  </a:lnTo>
-                  <a:lnTo>
-                    <a:pt x="4010861" y="1940027"/>
-                  </a:lnTo>
-                  <a:lnTo>
-                    <a:pt x="4082483" y="1834051"/>
-                  </a:lnTo>
-                  <a:lnTo>
-                    <a:pt x="4154106" y="1721517"/>
-                  </a:lnTo>
-                  <a:lnTo>
-                    <a:pt x="4225729" y="1602019"/>
-                  </a:lnTo>
-                  <a:lnTo>
-                    <a:pt x="4297351" y="1475127"/>
-                  </a:lnTo>
-                  <a:lnTo>
-                    <a:pt x="4368974" y="1340383"/>
-                  </a:lnTo>
-                  <a:lnTo>
-                    <a:pt x="4440596" y="1197300"/>
-                  </a:lnTo>
-                  <a:lnTo>
-                    <a:pt x="4512219" y="1045364"/>
-                  </a:lnTo>
-                  <a:lnTo>
-                    <a:pt x="4583841" y="884026"/>
-                  </a:lnTo>
-                  <a:lnTo>
-                    <a:pt x="4655464" y="712705"/>
-                  </a:lnTo>
-                  <a:lnTo>
-                    <a:pt x="4727086" y="530782"/>
-                  </a:lnTo>
-                  <a:lnTo>
-                    <a:pt x="4798709" y="337602"/>
-                  </a:lnTo>
-                  <a:lnTo>
-                    <a:pt x="4870331" y="132468"/>
-                  </a:lnTo>
-                  <a:lnTo>
-                    <a:pt x="4913887" y="0"/>
+                    <a:pt x="71622" y="2497289"/>
+                  </a:lnTo>
+                  <a:lnTo>
+                    <a:pt x="143245" y="2504869"/>
+                  </a:lnTo>
+                  <a:lnTo>
+                    <a:pt x="214867" y="2512400"/>
+                  </a:lnTo>
+                  <a:lnTo>
+                    <a:pt x="286490" y="2519882"/>
+                  </a:lnTo>
+                  <a:lnTo>
+                    <a:pt x="358112" y="2527314"/>
+                  </a:lnTo>
+                  <a:lnTo>
+                    <a:pt x="429735" y="2534698"/>
+                  </a:lnTo>
+                  <a:lnTo>
+                    <a:pt x="501357" y="2542033"/>
+                  </a:lnTo>
+                  <a:lnTo>
+                    <a:pt x="572980" y="2549320"/>
+                  </a:lnTo>
+                  <a:lnTo>
+                    <a:pt x="644602" y="2556559"/>
+                  </a:lnTo>
+                  <a:lnTo>
+                    <a:pt x="716225" y="2563751"/>
+                  </a:lnTo>
+                  <a:lnTo>
+                    <a:pt x="787847" y="2570895"/>
+                  </a:lnTo>
+                  <a:lnTo>
+                    <a:pt x="859470" y="2577993"/>
+                  </a:lnTo>
+                  <a:lnTo>
+                    <a:pt x="931092" y="2585044"/>
+                  </a:lnTo>
+                  <a:lnTo>
+                    <a:pt x="1002715" y="2592049"/>
+                  </a:lnTo>
+                  <a:lnTo>
+                    <a:pt x="1074337" y="2599008"/>
+                  </a:lnTo>
+                  <a:lnTo>
+                    <a:pt x="1145960" y="2605921"/>
+                  </a:lnTo>
+                  <a:lnTo>
+                    <a:pt x="1217582" y="2612789"/>
+                  </a:lnTo>
+                  <a:lnTo>
+                    <a:pt x="1289205" y="2619611"/>
+                  </a:lnTo>
+                  <a:lnTo>
+                    <a:pt x="1360827" y="2626390"/>
+                  </a:lnTo>
+                  <a:lnTo>
+                    <a:pt x="1432450" y="2633123"/>
+                  </a:lnTo>
+                  <a:lnTo>
+                    <a:pt x="1504073" y="2639812"/>
+                  </a:lnTo>
+                  <a:lnTo>
+                    <a:pt x="1575695" y="2646458"/>
+                  </a:lnTo>
+                  <a:lnTo>
+                    <a:pt x="1647318" y="2653060"/>
+                  </a:lnTo>
+                  <a:lnTo>
+                    <a:pt x="1718940" y="2659618"/>
+                  </a:lnTo>
+                  <a:lnTo>
+                    <a:pt x="1790563" y="2666134"/>
+                  </a:lnTo>
+                  <a:lnTo>
+                    <a:pt x="1862185" y="2672607"/>
+                  </a:lnTo>
+                  <a:lnTo>
+                    <a:pt x="1933808" y="2679037"/>
+                  </a:lnTo>
+                  <a:lnTo>
+                    <a:pt x="2005430" y="2685425"/>
+                  </a:lnTo>
+                  <a:lnTo>
+                    <a:pt x="2077053" y="2691771"/>
+                  </a:lnTo>
+                  <a:lnTo>
+                    <a:pt x="2148675" y="2698076"/>
+                  </a:lnTo>
+                  <a:lnTo>
+                    <a:pt x="2220298" y="2704339"/>
+                  </a:lnTo>
+                  <a:lnTo>
+                    <a:pt x="2291920" y="2710561"/>
+                  </a:lnTo>
+                  <a:lnTo>
+                    <a:pt x="2363543" y="2716742"/>
+                  </a:lnTo>
+                  <a:lnTo>
+                    <a:pt x="2435165" y="2722883"/>
+                  </a:lnTo>
+                  <a:lnTo>
+                    <a:pt x="2506788" y="2728983"/>
+                  </a:lnTo>
+                  <a:lnTo>
+                    <a:pt x="2578410" y="2735044"/>
+                  </a:lnTo>
+                  <a:lnTo>
+                    <a:pt x="2650033" y="2741064"/>
+                  </a:lnTo>
+                  <a:lnTo>
+                    <a:pt x="2721655" y="2747046"/>
+                  </a:lnTo>
+                  <a:lnTo>
+                    <a:pt x="2793278" y="2752987"/>
+                  </a:lnTo>
+                  <a:lnTo>
+                    <a:pt x="2864901" y="2758890"/>
+                  </a:lnTo>
+                  <a:lnTo>
+                    <a:pt x="2936523" y="2764755"/>
+                  </a:lnTo>
+                  <a:lnTo>
+                    <a:pt x="3008146" y="2770580"/>
+                  </a:lnTo>
+                  <a:lnTo>
+                    <a:pt x="3079768" y="2776368"/>
+                  </a:lnTo>
+                  <a:lnTo>
+                    <a:pt x="3151391" y="2782117"/>
+                  </a:lnTo>
+                  <a:lnTo>
+                    <a:pt x="3223013" y="2737111"/>
+                  </a:lnTo>
+                  <a:lnTo>
+                    <a:pt x="3294636" y="2680181"/>
+                  </a:lnTo>
+                  <a:lnTo>
+                    <a:pt x="3366258" y="2619711"/>
+                  </a:lnTo>
+                  <a:lnTo>
+                    <a:pt x="3437881" y="2555481"/>
+                  </a:lnTo>
+                  <a:lnTo>
+                    <a:pt x="3509503" y="2487257"/>
+                  </a:lnTo>
+                  <a:lnTo>
+                    <a:pt x="3581126" y="2414790"/>
+                  </a:lnTo>
+                  <a:lnTo>
+                    <a:pt x="3652748" y="2337817"/>
+                  </a:lnTo>
+                  <a:lnTo>
+                    <a:pt x="3724371" y="2256058"/>
+                  </a:lnTo>
+                  <a:lnTo>
+                    <a:pt x="3795993" y="2169215"/>
+                  </a:lnTo>
+                  <a:lnTo>
+                    <a:pt x="3867616" y="2076972"/>
+                  </a:lnTo>
+                  <a:lnTo>
+                    <a:pt x="3939238" y="1978993"/>
+                  </a:lnTo>
+                  <a:lnTo>
+                    <a:pt x="4010861" y="1874922"/>
+                  </a:lnTo>
+                  <a:lnTo>
+                    <a:pt x="4082483" y="1764379"/>
+                  </a:lnTo>
+                  <a:lnTo>
+                    <a:pt x="4154106" y="1646962"/>
+                  </a:lnTo>
+                  <a:lnTo>
+                    <a:pt x="4225729" y="1522244"/>
+                  </a:lnTo>
+                  <a:lnTo>
+                    <a:pt x="4297351" y="1389771"/>
+                  </a:lnTo>
+                  <a:lnTo>
+                    <a:pt x="4368974" y="1249060"/>
+                  </a:lnTo>
+                  <a:lnTo>
+                    <a:pt x="4440596" y="1099599"/>
+                  </a:lnTo>
+                  <a:lnTo>
+                    <a:pt x="4512219" y="940845"/>
+                  </a:lnTo>
+                  <a:lnTo>
+                    <a:pt x="4583841" y="772219"/>
+                  </a:lnTo>
+                  <a:lnTo>
+                    <a:pt x="4655464" y="593107"/>
+                  </a:lnTo>
+                  <a:lnTo>
+                    <a:pt x="4727086" y="402858"/>
+                  </a:lnTo>
+                  <a:lnTo>
+                    <a:pt x="4798709" y="200778"/>
+                  </a:lnTo>
+                  <a:lnTo>
+                    <a:pt x="4865704" y="0"/>
                   </a:lnTo>
                 </a:path>
               </a:pathLst>
@@ -3738,312 +3732,312 @@
           </p:nvSpPr>
           <p:spPr>
             <a:xfrm>
-              <a:off x="1172049" y="4680925"/>
-              <a:ext cx="7090630" cy="808928"/>
+              <a:off x="1172049" y="4684392"/>
+              <a:ext cx="7090630" cy="804180"/>
             </a:xfrm>
             <a:custGeom>
               <a:avLst/>
               <a:pathLst>
-                <a:path w="7090630" h="808928">
+                <a:path w="7090630" h="804180">
                   <a:moveTo>
-                    <a:pt x="7090630" y="226726"/>
+                    <a:pt x="7090630" y="258718"/>
                   </a:moveTo>
                   <a:lnTo>
-                    <a:pt x="7019007" y="223121"/>
-                  </a:lnTo>
-                  <a:lnTo>
-                    <a:pt x="6947385" y="219495"/>
-                  </a:lnTo>
-                  <a:lnTo>
-                    <a:pt x="6875762" y="215849"/>
-                  </a:lnTo>
-                  <a:lnTo>
-                    <a:pt x="6804139" y="212183"/>
-                  </a:lnTo>
-                  <a:lnTo>
-                    <a:pt x="6732517" y="208496"/>
-                  </a:lnTo>
-                  <a:lnTo>
-                    <a:pt x="6660894" y="204788"/>
-                  </a:lnTo>
-                  <a:lnTo>
-                    <a:pt x="6589272" y="201059"/>
-                  </a:lnTo>
-                  <a:lnTo>
-                    <a:pt x="6517649" y="197309"/>
-                  </a:lnTo>
-                  <a:lnTo>
-                    <a:pt x="6446027" y="193538"/>
-                  </a:lnTo>
-                  <a:lnTo>
-                    <a:pt x="6374404" y="189747"/>
-                  </a:lnTo>
-                  <a:lnTo>
-                    <a:pt x="6302782" y="185933"/>
-                  </a:lnTo>
-                  <a:lnTo>
-                    <a:pt x="6231159" y="182099"/>
-                  </a:lnTo>
-                  <a:lnTo>
-                    <a:pt x="6159537" y="178242"/>
-                  </a:lnTo>
-                  <a:lnTo>
-                    <a:pt x="6087914" y="174364"/>
-                  </a:lnTo>
-                  <a:lnTo>
-                    <a:pt x="6016292" y="170465"/>
-                  </a:lnTo>
-                  <a:lnTo>
-                    <a:pt x="5944669" y="166543"/>
-                  </a:lnTo>
-                  <a:lnTo>
-                    <a:pt x="5873047" y="162599"/>
-                  </a:lnTo>
-                  <a:lnTo>
-                    <a:pt x="5801424" y="158634"/>
-                  </a:lnTo>
-                  <a:lnTo>
-                    <a:pt x="5729802" y="154646"/>
-                  </a:lnTo>
-                  <a:lnTo>
-                    <a:pt x="5658179" y="150635"/>
-                  </a:lnTo>
-                  <a:lnTo>
-                    <a:pt x="5586557" y="146602"/>
-                  </a:lnTo>
-                  <a:lnTo>
-                    <a:pt x="5514934" y="142546"/>
-                  </a:lnTo>
-                  <a:lnTo>
-                    <a:pt x="5443311" y="138468"/>
-                  </a:lnTo>
-                  <a:lnTo>
-                    <a:pt x="5371689" y="134366"/>
-                  </a:lnTo>
-                  <a:lnTo>
-                    <a:pt x="5300066" y="130242"/>
-                  </a:lnTo>
-                  <a:lnTo>
-                    <a:pt x="5228444" y="126094"/>
-                  </a:lnTo>
-                  <a:lnTo>
-                    <a:pt x="5156821" y="121923"/>
-                  </a:lnTo>
-                  <a:lnTo>
-                    <a:pt x="5085199" y="117729"/>
-                  </a:lnTo>
-                  <a:lnTo>
-                    <a:pt x="5013576" y="113511"/>
-                  </a:lnTo>
-                  <a:lnTo>
-                    <a:pt x="4941954" y="109269"/>
-                  </a:lnTo>
-                  <a:lnTo>
-                    <a:pt x="4870331" y="105004"/>
-                  </a:lnTo>
-                  <a:lnTo>
-                    <a:pt x="4798709" y="100714"/>
-                  </a:lnTo>
-                  <a:lnTo>
-                    <a:pt x="4727086" y="96401"/>
-                  </a:lnTo>
-                  <a:lnTo>
-                    <a:pt x="4655464" y="92063"/>
-                  </a:lnTo>
-                  <a:lnTo>
-                    <a:pt x="4583841" y="87700"/>
-                  </a:lnTo>
-                  <a:lnTo>
-                    <a:pt x="4512219" y="83314"/>
-                  </a:lnTo>
-                  <a:lnTo>
-                    <a:pt x="4440596" y="78902"/>
-                  </a:lnTo>
-                  <a:lnTo>
-                    <a:pt x="4368974" y="74466"/>
-                  </a:lnTo>
-                  <a:lnTo>
-                    <a:pt x="4297351" y="70005"/>
-                  </a:lnTo>
-                  <a:lnTo>
-                    <a:pt x="4225729" y="65519"/>
-                  </a:lnTo>
-                  <a:lnTo>
-                    <a:pt x="4154106" y="61007"/>
-                  </a:lnTo>
-                  <a:lnTo>
-                    <a:pt x="4082483" y="56471"/>
-                  </a:lnTo>
-                  <a:lnTo>
-                    <a:pt x="4010861" y="51908"/>
-                  </a:lnTo>
-                  <a:lnTo>
-                    <a:pt x="3939238" y="47321"/>
-                  </a:lnTo>
-                  <a:lnTo>
-                    <a:pt x="3867616" y="42707"/>
-                  </a:lnTo>
-                  <a:lnTo>
-                    <a:pt x="3795993" y="38067"/>
-                  </a:lnTo>
-                  <a:lnTo>
-                    <a:pt x="3724371" y="33402"/>
-                  </a:lnTo>
-                  <a:lnTo>
-                    <a:pt x="3652748" y="28710"/>
-                  </a:lnTo>
-                  <a:lnTo>
-                    <a:pt x="3581126" y="23992"/>
-                  </a:lnTo>
-                  <a:lnTo>
-                    <a:pt x="3509503" y="19247"/>
-                  </a:lnTo>
-                  <a:lnTo>
-                    <a:pt x="3437881" y="14475"/>
-                  </a:lnTo>
-                  <a:lnTo>
-                    <a:pt x="3366258" y="9677"/>
-                  </a:lnTo>
-                  <a:lnTo>
-                    <a:pt x="3294636" y="4852"/>
+                    <a:pt x="7019007" y="254715"/>
+                  </a:lnTo>
+                  <a:lnTo>
+                    <a:pt x="6947385" y="250686"/>
+                  </a:lnTo>
+                  <a:lnTo>
+                    <a:pt x="6875762" y="246629"/>
+                  </a:lnTo>
+                  <a:lnTo>
+                    <a:pt x="6804139" y="242547"/>
+                  </a:lnTo>
+                  <a:lnTo>
+                    <a:pt x="6732517" y="238437"/>
+                  </a:lnTo>
+                  <a:lnTo>
+                    <a:pt x="6660894" y="234300"/>
+                  </a:lnTo>
+                  <a:lnTo>
+                    <a:pt x="6589272" y="230135"/>
+                  </a:lnTo>
+                  <a:lnTo>
+                    <a:pt x="6517649" y="225944"/>
+                  </a:lnTo>
+                  <a:lnTo>
+                    <a:pt x="6446027" y="221724"/>
+                  </a:lnTo>
+                  <a:lnTo>
+                    <a:pt x="6374404" y="217477"/>
+                  </a:lnTo>
+                  <a:lnTo>
+                    <a:pt x="6302782" y="213201"/>
+                  </a:lnTo>
+                  <a:lnTo>
+                    <a:pt x="6231159" y="208898"/>
+                  </a:lnTo>
+                  <a:lnTo>
+                    <a:pt x="6159537" y="204566"/>
+                  </a:lnTo>
+                  <a:lnTo>
+                    <a:pt x="6087914" y="200205"/>
+                  </a:lnTo>
+                  <a:lnTo>
+                    <a:pt x="6016292" y="195815"/>
+                  </a:lnTo>
+                  <a:lnTo>
+                    <a:pt x="5944669" y="191397"/>
+                  </a:lnTo>
+                  <a:lnTo>
+                    <a:pt x="5873047" y="186949"/>
+                  </a:lnTo>
+                  <a:lnTo>
+                    <a:pt x="5801424" y="182472"/>
+                  </a:lnTo>
+                  <a:lnTo>
+                    <a:pt x="5729802" y="177966"/>
+                  </a:lnTo>
+                  <a:lnTo>
+                    <a:pt x="5658179" y="173429"/>
+                  </a:lnTo>
+                  <a:lnTo>
+                    <a:pt x="5586557" y="168863"/>
+                  </a:lnTo>
+                  <a:lnTo>
+                    <a:pt x="5514934" y="164267"/>
+                  </a:lnTo>
+                  <a:lnTo>
+                    <a:pt x="5443311" y="159640"/>
+                  </a:lnTo>
+                  <a:lnTo>
+                    <a:pt x="5371689" y="154982"/>
+                  </a:lnTo>
+                  <a:lnTo>
+                    <a:pt x="5300066" y="150294"/>
+                  </a:lnTo>
+                  <a:lnTo>
+                    <a:pt x="5228444" y="145575"/>
+                  </a:lnTo>
+                  <a:lnTo>
+                    <a:pt x="5156821" y="140825"/>
+                  </a:lnTo>
+                  <a:lnTo>
+                    <a:pt x="5085199" y="136043"/>
+                  </a:lnTo>
+                  <a:lnTo>
+                    <a:pt x="5013576" y="131230"/>
+                  </a:lnTo>
+                  <a:lnTo>
+                    <a:pt x="4941954" y="126385"/>
+                  </a:lnTo>
+                  <a:lnTo>
+                    <a:pt x="4870331" y="121508"/>
+                  </a:lnTo>
+                  <a:lnTo>
+                    <a:pt x="4798709" y="116598"/>
+                  </a:lnTo>
+                  <a:lnTo>
+                    <a:pt x="4727086" y="111657"/>
+                  </a:lnTo>
+                  <a:lnTo>
+                    <a:pt x="4655464" y="106682"/>
+                  </a:lnTo>
+                  <a:lnTo>
+                    <a:pt x="4583841" y="101675"/>
+                  </a:lnTo>
+                  <a:lnTo>
+                    <a:pt x="4512219" y="96635"/>
+                  </a:lnTo>
+                  <a:lnTo>
+                    <a:pt x="4440596" y="91561"/>
+                  </a:lnTo>
+                  <a:lnTo>
+                    <a:pt x="4368974" y="86454"/>
+                  </a:lnTo>
+                  <a:lnTo>
+                    <a:pt x="4297351" y="81314"/>
+                  </a:lnTo>
+                  <a:lnTo>
+                    <a:pt x="4225729" y="76139"/>
+                  </a:lnTo>
+                  <a:lnTo>
+                    <a:pt x="4154106" y="70930"/>
+                  </a:lnTo>
+                  <a:lnTo>
+                    <a:pt x="4082483" y="65687"/>
+                  </a:lnTo>
+                  <a:lnTo>
+                    <a:pt x="4010861" y="60409"/>
+                  </a:lnTo>
+                  <a:lnTo>
+                    <a:pt x="3939238" y="55096"/>
+                  </a:lnTo>
+                  <a:lnTo>
+                    <a:pt x="3867616" y="49748"/>
+                  </a:lnTo>
+                  <a:lnTo>
+                    <a:pt x="3795993" y="44365"/>
+                  </a:lnTo>
+                  <a:lnTo>
+                    <a:pt x="3724371" y="38946"/>
+                  </a:lnTo>
+                  <a:lnTo>
+                    <a:pt x="3652748" y="33492"/>
+                  </a:lnTo>
+                  <a:lnTo>
+                    <a:pt x="3581126" y="28001"/>
+                  </a:lnTo>
+                  <a:lnTo>
+                    <a:pt x="3509503" y="22474"/>
+                  </a:lnTo>
+                  <a:lnTo>
+                    <a:pt x="3437881" y="16911"/>
+                  </a:lnTo>
+                  <a:lnTo>
+                    <a:pt x="3366258" y="11311"/>
+                  </a:lnTo>
+                  <a:lnTo>
+                    <a:pt x="3294636" y="5674"/>
                   </a:lnTo>
                   <a:lnTo>
                     <a:pt x="3223013" y="0"/>
                   </a:lnTo>
                   <a:lnTo>
-                    <a:pt x="3151391" y="35069"/>
-                  </a:lnTo>
-                  <a:lnTo>
-                    <a:pt x="3079768" y="83623"/>
-                  </a:lnTo>
-                  <a:lnTo>
-                    <a:pt x="3008146" y="129348"/>
-                  </a:lnTo>
-                  <a:lnTo>
-                    <a:pt x="2936523" y="172409"/>
-                  </a:lnTo>
-                  <a:lnTo>
-                    <a:pt x="2864901" y="212960"/>
-                  </a:lnTo>
-                  <a:lnTo>
-                    <a:pt x="2793278" y="251148"/>
-                  </a:lnTo>
-                  <a:lnTo>
-                    <a:pt x="2721655" y="287110"/>
-                  </a:lnTo>
-                  <a:lnTo>
-                    <a:pt x="2650033" y="320977"/>
-                  </a:lnTo>
-                  <a:lnTo>
-                    <a:pt x="2578410" y="352871"/>
-                  </a:lnTo>
-                  <a:lnTo>
-                    <a:pt x="2506788" y="382906"/>
-                  </a:lnTo>
-                  <a:lnTo>
-                    <a:pt x="2435165" y="411191"/>
-                  </a:lnTo>
-                  <a:lnTo>
-                    <a:pt x="2363543" y="437827"/>
-                  </a:lnTo>
-                  <a:lnTo>
-                    <a:pt x="2291920" y="462911"/>
-                  </a:lnTo>
-                  <a:lnTo>
-                    <a:pt x="2220298" y="486534"/>
-                  </a:lnTo>
-                  <a:lnTo>
-                    <a:pt x="2148675" y="508779"/>
-                  </a:lnTo>
-                  <a:lnTo>
-                    <a:pt x="2077053" y="529729"/>
-                  </a:lnTo>
-                  <a:lnTo>
-                    <a:pt x="2005430" y="549458"/>
-                  </a:lnTo>
-                  <a:lnTo>
-                    <a:pt x="1933808" y="568037"/>
-                  </a:lnTo>
-                  <a:lnTo>
-                    <a:pt x="1862185" y="585533"/>
-                  </a:lnTo>
-                  <a:lnTo>
-                    <a:pt x="1790563" y="602010"/>
-                  </a:lnTo>
-                  <a:lnTo>
-                    <a:pt x="1718940" y="617527"/>
-                  </a:lnTo>
-                  <a:lnTo>
-                    <a:pt x="1647318" y="632139"/>
-                  </a:lnTo>
-                  <a:lnTo>
-                    <a:pt x="1575695" y="645900"/>
-                  </a:lnTo>
-                  <a:lnTo>
-                    <a:pt x="1504073" y="658859"/>
-                  </a:lnTo>
-                  <a:lnTo>
-                    <a:pt x="1432450" y="671063"/>
-                  </a:lnTo>
-                  <a:lnTo>
-                    <a:pt x="1360827" y="682555"/>
-                  </a:lnTo>
-                  <a:lnTo>
-                    <a:pt x="1289205" y="693378"/>
-                  </a:lnTo>
-                  <a:lnTo>
-                    <a:pt x="1217582" y="703571"/>
-                  </a:lnTo>
-                  <a:lnTo>
-                    <a:pt x="1145960" y="713169"/>
-                  </a:lnTo>
-                  <a:lnTo>
-                    <a:pt x="1074337" y="722208"/>
-                  </a:lnTo>
-                  <a:lnTo>
-                    <a:pt x="1002715" y="730720"/>
-                  </a:lnTo>
-                  <a:lnTo>
-                    <a:pt x="931092" y="738736"/>
-                  </a:lnTo>
-                  <a:lnTo>
-                    <a:pt x="859470" y="746285"/>
-                  </a:lnTo>
-                  <a:lnTo>
-                    <a:pt x="787847" y="753394"/>
-                  </a:lnTo>
-                  <a:lnTo>
-                    <a:pt x="716225" y="760089"/>
-                  </a:lnTo>
-                  <a:lnTo>
-                    <a:pt x="644602" y="766394"/>
-                  </a:lnTo>
-                  <a:lnTo>
-                    <a:pt x="572980" y="772331"/>
-                  </a:lnTo>
-                  <a:lnTo>
-                    <a:pt x="501357" y="777923"/>
-                  </a:lnTo>
-                  <a:lnTo>
-                    <a:pt x="429735" y="783188"/>
-                  </a:lnTo>
-                  <a:lnTo>
-                    <a:pt x="358112" y="788147"/>
-                  </a:lnTo>
-                  <a:lnTo>
-                    <a:pt x="286490" y="792817"/>
-                  </a:lnTo>
-                  <a:lnTo>
-                    <a:pt x="214867" y="797214"/>
-                  </a:lnTo>
-                  <a:lnTo>
-                    <a:pt x="143245" y="801356"/>
-                  </a:lnTo>
-                  <a:lnTo>
-                    <a:pt x="71622" y="805256"/>
-                  </a:lnTo>
-                  <a:lnTo>
-                    <a:pt x="0" y="808928"/>
+                    <a:pt x="3151391" y="2879"/>
+                  </a:lnTo>
+                  <a:lnTo>
+                    <a:pt x="3079768" y="53338"/>
+                  </a:lnTo>
+                  <a:lnTo>
+                    <a:pt x="3008146" y="100844"/>
+                  </a:lnTo>
+                  <a:lnTo>
+                    <a:pt x="2936523" y="145568"/>
+                  </a:lnTo>
+                  <a:lnTo>
+                    <a:pt x="2864901" y="187674"/>
+                  </a:lnTo>
+                  <a:lnTo>
+                    <a:pt x="2793278" y="227315"/>
+                  </a:lnTo>
+                  <a:lnTo>
+                    <a:pt x="2721655" y="264636"/>
+                  </a:lnTo>
+                  <a:lnTo>
+                    <a:pt x="2650033" y="299772"/>
+                  </a:lnTo>
+                  <a:lnTo>
+                    <a:pt x="2578410" y="332850"/>
+                  </a:lnTo>
+                  <a:lnTo>
+                    <a:pt x="2506788" y="363993"/>
+                  </a:lnTo>
+                  <a:lnTo>
+                    <a:pt x="2435165" y="393312"/>
+                  </a:lnTo>
+                  <a:lnTo>
+                    <a:pt x="2363543" y="420914"/>
+                  </a:lnTo>
+                  <a:lnTo>
+                    <a:pt x="2291920" y="446901"/>
+                  </a:lnTo>
+                  <a:lnTo>
+                    <a:pt x="2220298" y="471367"/>
+                  </a:lnTo>
+                  <a:lnTo>
+                    <a:pt x="2148675" y="494400"/>
+                  </a:lnTo>
+                  <a:lnTo>
+                    <a:pt x="2077053" y="516085"/>
+                  </a:lnTo>
+                  <a:lnTo>
+                    <a:pt x="2005430" y="536500"/>
+                  </a:lnTo>
+                  <a:lnTo>
+                    <a:pt x="1933808" y="555720"/>
+                  </a:lnTo>
+                  <a:lnTo>
+                    <a:pt x="1862185" y="573815"/>
+                  </a:lnTo>
+                  <a:lnTo>
+                    <a:pt x="1790563" y="590851"/>
+                  </a:lnTo>
+                  <a:lnTo>
+                    <a:pt x="1718940" y="606889"/>
+                  </a:lnTo>
+                  <a:lnTo>
+                    <a:pt x="1647318" y="621989"/>
+                  </a:lnTo>
+                  <a:lnTo>
+                    <a:pt x="1575695" y="636204"/>
+                  </a:lnTo>
+                  <a:lnTo>
+                    <a:pt x="1504073" y="649588"/>
+                  </a:lnTo>
+                  <a:lnTo>
+                    <a:pt x="1432450" y="662187"/>
+                  </a:lnTo>
+                  <a:lnTo>
+                    <a:pt x="1360827" y="674050"/>
+                  </a:lnTo>
+                  <a:lnTo>
+                    <a:pt x="1289205" y="685217"/>
+                  </a:lnTo>
+                  <a:lnTo>
+                    <a:pt x="1217582" y="695731"/>
+                  </a:lnTo>
+                  <a:lnTo>
+                    <a:pt x="1145960" y="705630"/>
+                  </a:lnTo>
+                  <a:lnTo>
+                    <a:pt x="1074337" y="714949"/>
+                  </a:lnTo>
+                  <a:lnTo>
+                    <a:pt x="1002715" y="723722"/>
+                  </a:lnTo>
+                  <a:lnTo>
+                    <a:pt x="931092" y="731982"/>
+                  </a:lnTo>
+                  <a:lnTo>
+                    <a:pt x="859470" y="739758"/>
+                  </a:lnTo>
+                  <a:lnTo>
+                    <a:pt x="787847" y="747079"/>
+                  </a:lnTo>
+                  <a:lnTo>
+                    <a:pt x="716225" y="753972"/>
+                  </a:lnTo>
+                  <a:lnTo>
+                    <a:pt x="644602" y="760461"/>
+                  </a:lnTo>
+                  <a:lnTo>
+                    <a:pt x="572980" y="766570"/>
+                  </a:lnTo>
+                  <a:lnTo>
+                    <a:pt x="501357" y="772321"/>
+                  </a:lnTo>
+                  <a:lnTo>
+                    <a:pt x="429735" y="777736"/>
+                  </a:lnTo>
+                  <a:lnTo>
+                    <a:pt x="358112" y="782833"/>
+                  </a:lnTo>
+                  <a:lnTo>
+                    <a:pt x="286490" y="787633"/>
+                  </a:lnTo>
+                  <a:lnTo>
+                    <a:pt x="214867" y="792151"/>
+                  </a:lnTo>
+                  <a:lnTo>
+                    <a:pt x="143245" y="796405"/>
+                  </a:lnTo>
+                  <a:lnTo>
+                    <a:pt x="71622" y="800410"/>
+                  </a:lnTo>
+                  <a:lnTo>
+                    <a:pt x="0" y="804180"/>
                   </a:lnTo>
                 </a:path>
               </a:pathLst>
@@ -4064,308 +4058,308 @@
           <p:spPr>
             <a:xfrm>
               <a:off x="1172049" y="1896563"/>
-              <a:ext cx="6978542" cy="3395123"/>
+              <a:ext cx="6986820" cy="3387095"/>
             </a:xfrm>
             <a:custGeom>
               <a:avLst/>
               <a:pathLst>
-                <a:path w="6978542" h="3395123">
+                <a:path w="6986820" h="3387095">
                   <a:moveTo>
-                    <a:pt x="0" y="3395123"/>
+                    <a:pt x="0" y="3387095"/>
                   </a:moveTo>
                   <a:lnTo>
-                    <a:pt x="71622" y="3388017"/>
-                  </a:lnTo>
-                  <a:lnTo>
-                    <a:pt x="143245" y="3380716"/>
-                  </a:lnTo>
-                  <a:lnTo>
-                    <a:pt x="214867" y="3373213"/>
-                  </a:lnTo>
-                  <a:lnTo>
-                    <a:pt x="286490" y="3365503"/>
-                  </a:lnTo>
-                  <a:lnTo>
-                    <a:pt x="358112" y="3357580"/>
-                  </a:lnTo>
-                  <a:lnTo>
-                    <a:pt x="429735" y="3349439"/>
-                  </a:lnTo>
-                  <a:lnTo>
-                    <a:pt x="501357" y="3341072"/>
-                  </a:lnTo>
-                  <a:lnTo>
-                    <a:pt x="572980" y="3332476"/>
-                  </a:lnTo>
-                  <a:lnTo>
-                    <a:pt x="644602" y="3323641"/>
-                  </a:lnTo>
-                  <a:lnTo>
-                    <a:pt x="716225" y="3314564"/>
-                  </a:lnTo>
-                  <a:lnTo>
-                    <a:pt x="787847" y="3305235"/>
-                  </a:lnTo>
-                  <a:lnTo>
-                    <a:pt x="859470" y="3295650"/>
-                  </a:lnTo>
-                  <a:lnTo>
-                    <a:pt x="931092" y="3285799"/>
-                  </a:lnTo>
-                  <a:lnTo>
-                    <a:pt x="1002715" y="3275677"/>
-                  </a:lnTo>
-                  <a:lnTo>
-                    <a:pt x="1074337" y="3265276"/>
-                  </a:lnTo>
-                  <a:lnTo>
-                    <a:pt x="1145960" y="3254588"/>
-                  </a:lnTo>
-                  <a:lnTo>
-                    <a:pt x="1217582" y="3243605"/>
-                  </a:lnTo>
-                  <a:lnTo>
-                    <a:pt x="1289205" y="3232318"/>
-                  </a:lnTo>
-                  <a:lnTo>
-                    <a:pt x="1360827" y="3220721"/>
-                  </a:lnTo>
-                  <a:lnTo>
-                    <a:pt x="1432450" y="3208803"/>
-                  </a:lnTo>
-                  <a:lnTo>
-                    <a:pt x="1504073" y="3196557"/>
-                  </a:lnTo>
-                  <a:lnTo>
-                    <a:pt x="1575695" y="3183972"/>
-                  </a:lnTo>
-                  <a:lnTo>
-                    <a:pt x="1647318" y="3171041"/>
-                  </a:lnTo>
-                  <a:lnTo>
-                    <a:pt x="1718940" y="3157752"/>
-                  </a:lnTo>
-                  <a:lnTo>
-                    <a:pt x="1790563" y="3144097"/>
-                  </a:lnTo>
-                  <a:lnTo>
-                    <a:pt x="1862185" y="3130065"/>
-                  </a:lnTo>
-                  <a:lnTo>
-                    <a:pt x="1933808" y="3115646"/>
-                  </a:lnTo>
-                  <a:lnTo>
-                    <a:pt x="2005430" y="3100829"/>
-                  </a:lnTo>
-                  <a:lnTo>
-                    <a:pt x="2077053" y="3085603"/>
-                  </a:lnTo>
-                  <a:lnTo>
-                    <a:pt x="2148675" y="3069958"/>
-                  </a:lnTo>
-                  <a:lnTo>
-                    <a:pt x="2220298" y="3053880"/>
-                  </a:lnTo>
-                  <a:lnTo>
-                    <a:pt x="2291920" y="3037359"/>
-                  </a:lnTo>
-                  <a:lnTo>
-                    <a:pt x="2363543" y="3020382"/>
-                  </a:lnTo>
-                  <a:lnTo>
-                    <a:pt x="2435165" y="3002937"/>
-                  </a:lnTo>
-                  <a:lnTo>
-                    <a:pt x="2506788" y="2985010"/>
-                  </a:lnTo>
-                  <a:lnTo>
-                    <a:pt x="2578410" y="2966588"/>
-                  </a:lnTo>
-                  <a:lnTo>
-                    <a:pt x="2650033" y="2947659"/>
-                  </a:lnTo>
-                  <a:lnTo>
-                    <a:pt x="2721655" y="2928207"/>
-                  </a:lnTo>
-                  <a:lnTo>
-                    <a:pt x="2793278" y="2908218"/>
-                  </a:lnTo>
-                  <a:lnTo>
-                    <a:pt x="2864901" y="2887678"/>
-                  </a:lnTo>
-                  <a:lnTo>
-                    <a:pt x="2936523" y="2866571"/>
-                  </a:lnTo>
-                  <a:lnTo>
-                    <a:pt x="3008146" y="2844881"/>
-                  </a:lnTo>
-                  <a:lnTo>
-                    <a:pt x="3079768" y="2822593"/>
-                  </a:lnTo>
-                  <a:lnTo>
-                    <a:pt x="3151391" y="2799690"/>
-                  </a:lnTo>
-                  <a:lnTo>
-                    <a:pt x="3223013" y="2776156"/>
-                  </a:lnTo>
-                  <a:lnTo>
-                    <a:pt x="3294636" y="2751972"/>
-                  </a:lnTo>
-                  <a:lnTo>
-                    <a:pt x="3366258" y="2727120"/>
-                  </a:lnTo>
-                  <a:lnTo>
-                    <a:pt x="3437881" y="2701583"/>
-                  </a:lnTo>
-                  <a:lnTo>
-                    <a:pt x="3509503" y="2675341"/>
-                  </a:lnTo>
-                  <a:lnTo>
-                    <a:pt x="3581126" y="2648375"/>
-                  </a:lnTo>
-                  <a:lnTo>
-                    <a:pt x="3652748" y="2620665"/>
-                  </a:lnTo>
-                  <a:lnTo>
-                    <a:pt x="3724371" y="2592191"/>
-                  </a:lnTo>
-                  <a:lnTo>
-                    <a:pt x="3795993" y="2562931"/>
-                  </a:lnTo>
-                  <a:lnTo>
-                    <a:pt x="3867616" y="2532863"/>
-                  </a:lnTo>
-                  <a:lnTo>
-                    <a:pt x="3939238" y="2501966"/>
-                  </a:lnTo>
-                  <a:lnTo>
-                    <a:pt x="4010861" y="2470217"/>
-                  </a:lnTo>
-                  <a:lnTo>
-                    <a:pt x="4082483" y="2437591"/>
-                  </a:lnTo>
-                  <a:lnTo>
-                    <a:pt x="4154106" y="2404065"/>
-                  </a:lnTo>
-                  <a:lnTo>
-                    <a:pt x="4225729" y="2369614"/>
-                  </a:lnTo>
-                  <a:lnTo>
-                    <a:pt x="4297351" y="2334213"/>
-                  </a:lnTo>
-                  <a:lnTo>
-                    <a:pt x="4368974" y="2297835"/>
-                  </a:lnTo>
-                  <a:lnTo>
-                    <a:pt x="4440596" y="2260452"/>
-                  </a:lnTo>
-                  <a:lnTo>
-                    <a:pt x="4512219" y="2222039"/>
-                  </a:lnTo>
-                  <a:lnTo>
-                    <a:pt x="4583841" y="2182566"/>
-                  </a:lnTo>
-                  <a:lnTo>
-                    <a:pt x="4655464" y="2142003"/>
-                  </a:lnTo>
-                  <a:lnTo>
-                    <a:pt x="4727086" y="2100321"/>
-                  </a:lnTo>
-                  <a:lnTo>
-                    <a:pt x="4798709" y="2057489"/>
-                  </a:lnTo>
-                  <a:lnTo>
-                    <a:pt x="4870331" y="2013476"/>
-                  </a:lnTo>
-                  <a:lnTo>
-                    <a:pt x="4941954" y="1968248"/>
-                  </a:lnTo>
-                  <a:lnTo>
-                    <a:pt x="5013576" y="1921772"/>
-                  </a:lnTo>
-                  <a:lnTo>
-                    <a:pt x="5085199" y="1874013"/>
-                  </a:lnTo>
-                  <a:lnTo>
-                    <a:pt x="5156821" y="1824937"/>
-                  </a:lnTo>
-                  <a:lnTo>
-                    <a:pt x="5228444" y="1774507"/>
-                  </a:lnTo>
-                  <a:lnTo>
-                    <a:pt x="5300066" y="1722685"/>
-                  </a:lnTo>
-                  <a:lnTo>
-                    <a:pt x="5371689" y="1669433"/>
-                  </a:lnTo>
-                  <a:lnTo>
-                    <a:pt x="5443311" y="1614712"/>
-                  </a:lnTo>
-                  <a:lnTo>
-                    <a:pt x="5514934" y="1558482"/>
-                  </a:lnTo>
-                  <a:lnTo>
-                    <a:pt x="5586557" y="1500699"/>
-                  </a:lnTo>
-                  <a:lnTo>
-                    <a:pt x="5658179" y="1441323"/>
-                  </a:lnTo>
-                  <a:lnTo>
-                    <a:pt x="5729802" y="1380308"/>
-                  </a:lnTo>
-                  <a:lnTo>
-                    <a:pt x="5801424" y="1317609"/>
-                  </a:lnTo>
-                  <a:lnTo>
-                    <a:pt x="5873047" y="1253180"/>
-                  </a:lnTo>
-                  <a:lnTo>
-                    <a:pt x="5944669" y="1186974"/>
-                  </a:lnTo>
-                  <a:lnTo>
-                    <a:pt x="6016292" y="1118941"/>
-                  </a:lnTo>
-                  <a:lnTo>
-                    <a:pt x="6087914" y="1049031"/>
-                  </a:lnTo>
-                  <a:lnTo>
-                    <a:pt x="6159537" y="977192"/>
-                  </a:lnTo>
-                  <a:lnTo>
-                    <a:pt x="6231159" y="903370"/>
-                  </a:lnTo>
-                  <a:lnTo>
-                    <a:pt x="6302782" y="827512"/>
-                  </a:lnTo>
-                  <a:lnTo>
-                    <a:pt x="6374404" y="749561"/>
-                  </a:lnTo>
-                  <a:lnTo>
-                    <a:pt x="6446027" y="669459"/>
-                  </a:lnTo>
-                  <a:lnTo>
-                    <a:pt x="6517649" y="587146"/>
-                  </a:lnTo>
-                  <a:lnTo>
-                    <a:pt x="6589272" y="502563"/>
-                  </a:lnTo>
-                  <a:lnTo>
-                    <a:pt x="6660894" y="415645"/>
-                  </a:lnTo>
-                  <a:lnTo>
-                    <a:pt x="6732517" y="326330"/>
-                  </a:lnTo>
-                  <a:lnTo>
-                    <a:pt x="6804139" y="234550"/>
-                  </a:lnTo>
-                  <a:lnTo>
-                    <a:pt x="6875762" y="140237"/>
-                  </a:lnTo>
-                  <a:lnTo>
-                    <a:pt x="6947385" y="43323"/>
-                  </a:lnTo>
-                  <a:lnTo>
-                    <a:pt x="6978542" y="0"/>
+                    <a:pt x="71622" y="3379862"/>
+                  </a:lnTo>
+                  <a:lnTo>
+                    <a:pt x="143245" y="3372433"/>
+                  </a:lnTo>
+                  <a:lnTo>
+                    <a:pt x="214867" y="3364801"/>
+                  </a:lnTo>
+                  <a:lnTo>
+                    <a:pt x="286490" y="3356961"/>
+                  </a:lnTo>
+                  <a:lnTo>
+                    <a:pt x="358112" y="3348908"/>
+                  </a:lnTo>
+                  <a:lnTo>
+                    <a:pt x="429735" y="3340636"/>
+                  </a:lnTo>
+                  <a:lnTo>
+                    <a:pt x="501357" y="3332138"/>
+                  </a:lnTo>
+                  <a:lnTo>
+                    <a:pt x="572980" y="3323409"/>
+                  </a:lnTo>
+                  <a:lnTo>
+                    <a:pt x="644602" y="3314442"/>
+                  </a:lnTo>
+                  <a:lnTo>
+                    <a:pt x="716225" y="3305231"/>
+                  </a:lnTo>
+                  <a:lnTo>
+                    <a:pt x="787847" y="3295769"/>
+                  </a:lnTo>
+                  <a:lnTo>
+                    <a:pt x="859470" y="3286049"/>
+                  </a:lnTo>
+                  <a:lnTo>
+                    <a:pt x="931092" y="3276065"/>
+                  </a:lnTo>
+                  <a:lnTo>
+                    <a:pt x="1002715" y="3265809"/>
+                  </a:lnTo>
+                  <a:lnTo>
+                    <a:pt x="1074337" y="3255273"/>
+                  </a:lnTo>
+                  <a:lnTo>
+                    <a:pt x="1145960" y="3244450"/>
+                  </a:lnTo>
+                  <a:lnTo>
+                    <a:pt x="1217582" y="3233333"/>
+                  </a:lnTo>
+                  <a:lnTo>
+                    <a:pt x="1289205" y="3221913"/>
+                  </a:lnTo>
+                  <a:lnTo>
+                    <a:pt x="1360827" y="3210181"/>
+                  </a:lnTo>
+                  <a:lnTo>
+                    <a:pt x="1432450" y="3198131"/>
+                  </a:lnTo>
+                  <a:lnTo>
+                    <a:pt x="1504073" y="3185752"/>
+                  </a:lnTo>
+                  <a:lnTo>
+                    <a:pt x="1575695" y="3173036"/>
+                  </a:lnTo>
+                  <a:lnTo>
+                    <a:pt x="1647318" y="3159973"/>
+                  </a:lnTo>
+                  <a:lnTo>
+                    <a:pt x="1718940" y="3146555"/>
+                  </a:lnTo>
+                  <a:lnTo>
+                    <a:pt x="1790563" y="3132771"/>
+                  </a:lnTo>
+                  <a:lnTo>
+                    <a:pt x="1862185" y="3118612"/>
+                  </a:lnTo>
+                  <a:lnTo>
+                    <a:pt x="1933808" y="3104067"/>
+                  </a:lnTo>
+                  <a:lnTo>
+                    <a:pt x="2005430" y="3089127"/>
+                  </a:lnTo>
+                  <a:lnTo>
+                    <a:pt x="2077053" y="3073779"/>
+                  </a:lnTo>
+                  <a:lnTo>
+                    <a:pt x="2148675" y="3058013"/>
+                  </a:lnTo>
+                  <a:lnTo>
+                    <a:pt x="2220298" y="3041818"/>
+                  </a:lnTo>
+                  <a:lnTo>
+                    <a:pt x="2291920" y="3025182"/>
+                  </a:lnTo>
+                  <a:lnTo>
+                    <a:pt x="2363543" y="3008092"/>
+                  </a:lnTo>
+                  <a:lnTo>
+                    <a:pt x="2435165" y="2990538"/>
+                  </a:lnTo>
+                  <a:lnTo>
+                    <a:pt x="2506788" y="2972505"/>
+                  </a:lnTo>
+                  <a:lnTo>
+                    <a:pt x="2578410" y="2953981"/>
+                  </a:lnTo>
+                  <a:lnTo>
+                    <a:pt x="2650033" y="2934952"/>
+                  </a:lnTo>
+                  <a:lnTo>
+                    <a:pt x="2721655" y="2915405"/>
+                  </a:lnTo>
+                  <a:lnTo>
+                    <a:pt x="2793278" y="2895326"/>
+                  </a:lnTo>
+                  <a:lnTo>
+                    <a:pt x="2864901" y="2874700"/>
+                  </a:lnTo>
+                  <a:lnTo>
+                    <a:pt x="2936523" y="2853512"/>
+                  </a:lnTo>
+                  <a:lnTo>
+                    <a:pt x="3008146" y="2831748"/>
+                  </a:lnTo>
+                  <a:lnTo>
+                    <a:pt x="3079768" y="2809390"/>
+                  </a:lnTo>
+                  <a:lnTo>
+                    <a:pt x="3151391" y="2786423"/>
+                  </a:lnTo>
+                  <a:lnTo>
+                    <a:pt x="3223013" y="2762831"/>
+                  </a:lnTo>
+                  <a:lnTo>
+                    <a:pt x="3294636" y="2738597"/>
+                  </a:lnTo>
+                  <a:lnTo>
+                    <a:pt x="3366258" y="2713702"/>
+                  </a:lnTo>
+                  <a:lnTo>
+                    <a:pt x="3437881" y="2688129"/>
+                  </a:lnTo>
+                  <a:lnTo>
+                    <a:pt x="3509503" y="2661860"/>
+                  </a:lnTo>
+                  <a:lnTo>
+                    <a:pt x="3581126" y="2634875"/>
+                  </a:lnTo>
+                  <a:lnTo>
+                    <a:pt x="3652748" y="2607156"/>
+                  </a:lnTo>
+                  <a:lnTo>
+                    <a:pt x="3724371" y="2578681"/>
+                  </a:lnTo>
+                  <a:lnTo>
+                    <a:pt x="3795993" y="2549431"/>
+                  </a:lnTo>
+                  <a:lnTo>
+                    <a:pt x="3867616" y="2519385"/>
+                  </a:lnTo>
+                  <a:lnTo>
+                    <a:pt x="3939238" y="2488519"/>
+                  </a:lnTo>
+                  <a:lnTo>
+                    <a:pt x="4010861" y="2456814"/>
+                  </a:lnTo>
+                  <a:lnTo>
+                    <a:pt x="4082483" y="2424245"/>
+                  </a:lnTo>
+                  <a:lnTo>
+                    <a:pt x="4154106" y="2390788"/>
+                  </a:lnTo>
+                  <a:lnTo>
+                    <a:pt x="4225729" y="2356421"/>
+                  </a:lnTo>
+                  <a:lnTo>
+                    <a:pt x="4297351" y="2321117"/>
+                  </a:lnTo>
+                  <a:lnTo>
+                    <a:pt x="4368974" y="2284852"/>
+                  </a:lnTo>
+                  <a:lnTo>
+                    <a:pt x="4440596" y="2247600"/>
+                  </a:lnTo>
+                  <a:lnTo>
+                    <a:pt x="4512219" y="2209332"/>
+                  </a:lnTo>
+                  <a:lnTo>
+                    <a:pt x="4583841" y="2170023"/>
+                  </a:lnTo>
+                  <a:lnTo>
+                    <a:pt x="4655464" y="2129643"/>
+                  </a:lnTo>
+                  <a:lnTo>
+                    <a:pt x="4727086" y="2088163"/>
+                  </a:lnTo>
+                  <a:lnTo>
+                    <a:pt x="4798709" y="2045553"/>
+                  </a:lnTo>
+                  <a:lnTo>
+                    <a:pt x="4870331" y="2001783"/>
+                  </a:lnTo>
+                  <a:lnTo>
+                    <a:pt x="4941954" y="1956821"/>
+                  </a:lnTo>
+                  <a:lnTo>
+                    <a:pt x="5013576" y="1910634"/>
+                  </a:lnTo>
+                  <a:lnTo>
+                    <a:pt x="5085199" y="1863189"/>
+                  </a:lnTo>
+                  <a:lnTo>
+                    <a:pt x="5156821" y="1814452"/>
+                  </a:lnTo>
+                  <a:lnTo>
+                    <a:pt x="5228444" y="1764388"/>
+                  </a:lnTo>
+                  <a:lnTo>
+                    <a:pt x="5300066" y="1712960"/>
+                  </a:lnTo>
+                  <a:lnTo>
+                    <a:pt x="5371689" y="1660131"/>
+                  </a:lnTo>
+                  <a:lnTo>
+                    <a:pt x="5443311" y="1605864"/>
+                  </a:lnTo>
+                  <a:lnTo>
+                    <a:pt x="5514934" y="1550118"/>
+                  </a:lnTo>
+                  <a:lnTo>
+                    <a:pt x="5586557" y="1492855"/>
+                  </a:lnTo>
+                  <a:lnTo>
+                    <a:pt x="5658179" y="1434032"/>
+                  </a:lnTo>
+                  <a:lnTo>
+                    <a:pt x="5729802" y="1373606"/>
+                  </a:lnTo>
+                  <a:lnTo>
+                    <a:pt x="5801424" y="1311535"/>
+                  </a:lnTo>
+                  <a:lnTo>
+                    <a:pt x="5873047" y="1247773"/>
+                  </a:lnTo>
+                  <a:lnTo>
+                    <a:pt x="5944669" y="1182275"/>
+                  </a:lnTo>
+                  <a:lnTo>
+                    <a:pt x="6016292" y="1114993"/>
+                  </a:lnTo>
+                  <a:lnTo>
+                    <a:pt x="6087914" y="1045878"/>
+                  </a:lnTo>
+                  <a:lnTo>
+                    <a:pt x="6159537" y="974882"/>
+                  </a:lnTo>
+                  <a:lnTo>
+                    <a:pt x="6231159" y="901951"/>
+                  </a:lnTo>
+                  <a:lnTo>
+                    <a:pt x="6302782" y="827034"/>
+                  </a:lnTo>
+                  <a:lnTo>
+                    <a:pt x="6374404" y="750077"/>
+                  </a:lnTo>
+                  <a:lnTo>
+                    <a:pt x="6446027" y="671023"/>
+                  </a:lnTo>
+                  <a:lnTo>
+                    <a:pt x="6517649" y="589817"/>
+                  </a:lnTo>
+                  <a:lnTo>
+                    <a:pt x="6589272" y="506399"/>
+                  </a:lnTo>
+                  <a:lnTo>
+                    <a:pt x="6660894" y="420709"/>
+                  </a:lnTo>
+                  <a:lnTo>
+                    <a:pt x="6732517" y="332685"/>
+                  </a:lnTo>
+                  <a:lnTo>
+                    <a:pt x="6804139" y="242264"/>
+                  </a:lnTo>
+                  <a:lnTo>
+                    <a:pt x="6875762" y="149380"/>
+                  </a:lnTo>
+                  <a:lnTo>
+                    <a:pt x="6947385" y="53966"/>
+                  </a:lnTo>
+                  <a:lnTo>
+                    <a:pt x="6986820" y="0"/>
                   </a:lnTo>
                 </a:path>
               </a:pathLst>
@@ -4437,7 +4431,7 @@
           </p:nvSpPr>
           <p:spPr>
             <a:xfrm>
-              <a:off x="4374536" y="1896563"/>
+              <a:off x="4334057" y="1896563"/>
               <a:ext cx="0" cy="3826579"/>
             </a:xfrm>
             <a:custGeom>
@@ -4710,7 +4704,7 @@
           </p:nvSpPr>
           <p:spPr>
             <a:xfrm>
-              <a:off x="2009531" y="5785772"/>
+              <a:off x="2008892" y="5785772"/>
               <a:ext cx="223753" cy="80101"/>
             </a:xfrm>
             <a:prstGeom prst="rect">
@@ -4756,7 +4750,7 @@
           </p:nvSpPr>
           <p:spPr>
             <a:xfrm>
-              <a:off x="4372762" y="5785772"/>
+              <a:off x="4369739" y="5785772"/>
               <a:ext cx="62179" cy="80101"/>
             </a:xfrm>
             <a:prstGeom prst="rect">
@@ -4802,7 +4796,7 @@
           </p:nvSpPr>
           <p:spPr>
             <a:xfrm>
-              <a:off x="6593026" y="5785772"/>
+              <a:off x="6587619" y="5785772"/>
               <a:ext cx="186537" cy="80101"/>
             </a:xfrm>
             <a:prstGeom prst="rect">
